--- a/system-design-101/vi/lessons/sd-02-024/slides/sd-02-024.pptx
+++ b/system-design-101/vi/lessons/sd-02-024/slides/sd-02-024.pptx
@@ -8436,6 +8436,116 @@
               <a:buNone/>
             </a:pPr>
             <a:r>
+              <a:rPr lang="en-US" sz="2550" dirty="0" spc="4" kern="0">
+                <a:solidFill>
+                  <a:srgbClr val="14161C"/>
+                </a:solidFill>
+                <a:latin typeface="Be Vietnam Pro" pitchFamily="34" charset="0"/>
+                <a:ea typeface="Be Vietnam Pro" pitchFamily="34" charset="-122"/>
+                <a:cs typeface="Be Vietnam Pro" pitchFamily="34" charset="-120"/>
+              </a:rPr>
+              <a:t>Nếu</a:t>
+            </a:r>
+            <a:r>
+              <a:rPr lang="en-US" sz="2550" dirty="0" spc="-2" kern="0">
+                <a:solidFill>
+                  <a:srgbClr val="14161C"/>
+                </a:solidFill>
+                <a:latin typeface="Be Vietnam Pro" pitchFamily="34" charset="0"/>
+                <a:ea typeface="Be Vietnam Pro" pitchFamily="34" charset="-122"/>
+                <a:cs typeface="Be Vietnam Pro" pitchFamily="34" charset="-120"/>
+              </a:rPr>
+              <a:t> 50</a:t>
+            </a:r>
+            <a:r>
+              <a:rPr lang="en-US" sz="2550" dirty="0" spc="-21" kern="0">
+                <a:solidFill>
+                  <a:srgbClr val="14161C"/>
+                </a:solidFill>
+                <a:latin typeface="Be Vietnam Pro" pitchFamily="34" charset="0"/>
+                <a:ea typeface="Be Vietnam Pro" pitchFamily="34" charset="-122"/>
+                <a:cs typeface="Be Vietnam Pro" pitchFamily="34" charset="-120"/>
+              </a:rPr>
+              <a:t> yêu</a:t>
+            </a:r>
+            <a:r>
+              <a:rPr lang="en-US" sz="2550" dirty="0" spc="2" kern="0">
+                <a:solidFill>
+                  <a:srgbClr val="14161C"/>
+                </a:solidFill>
+                <a:latin typeface="Be Vietnam Pro" pitchFamily="34" charset="0"/>
+                <a:ea typeface="Be Vietnam Pro" pitchFamily="34" charset="-122"/>
+                <a:cs typeface="Be Vietnam Pro" pitchFamily="34" charset="-120"/>
+              </a:rPr>
+              <a:t> cầu</a:t>
+            </a:r>
+            <a:r>
+              <a:rPr lang="en-US" sz="2550" dirty="0" spc="-7" kern="0">
+                <a:solidFill>
+                  <a:srgbClr val="14161C"/>
+                </a:solidFill>
+                <a:latin typeface="Be Vietnam Pro" pitchFamily="34" charset="0"/>
+                <a:ea typeface="Be Vietnam Pro" pitchFamily="34" charset="-122"/>
+                <a:cs typeface="Be Vietnam Pro" pitchFamily="34" charset="-120"/>
+              </a:rPr>
+              <a:t> chạy</a:t>
+            </a:r>
+            <a:r>
+              <a:rPr lang="en-US" sz="2550" dirty="0" spc="-1" kern="0">
+                <a:solidFill>
+                  <a:srgbClr val="14161C"/>
+                </a:solidFill>
+                <a:latin typeface="Be Vietnam Pro" pitchFamily="34" charset="0"/>
+                <a:ea typeface="Be Vietnam Pro" pitchFamily="34" charset="-122"/>
+                <a:cs typeface="Be Vietnam Pro" pitchFamily="34" charset="-120"/>
+              </a:rPr>
+              <a:t> cùng</a:t>
+            </a:r>
+            <a:r>
+              <a:rPr lang="en-US" sz="2550" dirty="0" spc="-2" kern="0">
+                <a:solidFill>
+                  <a:srgbClr val="14161C"/>
+                </a:solidFill>
+                <a:latin typeface="Be Vietnam Pro" pitchFamily="34" charset="0"/>
+                <a:ea typeface="Be Vietnam Pro" pitchFamily="34" charset="-122"/>
+                <a:cs typeface="Be Vietnam Pro" pitchFamily="34" charset="-120"/>
+              </a:rPr>
+              <a:t> lúc,</a:t>
+            </a:r>
+            <a:r>
+              <a:rPr lang="en-US" sz="2550" dirty="0" spc="0" kern="0">
+                <a:solidFill>
+                  <a:srgbClr val="14161C"/>
+                </a:solidFill>
+                <a:latin typeface="Be Vietnam Pro" pitchFamily="34" charset="0"/>
+                <a:ea typeface="Be Vietnam Pro" pitchFamily="34" charset="-122"/>
+                <a:cs typeface="Be Vietnam Pro" pitchFamily="34" charset="-120"/>
+              </a:rPr>
+              <a:t> mỗi</a:t>
+            </a:r>
+            <a:r>
+              <a:rPr lang="en-US" sz="2550" dirty="0" spc="-20" kern="0">
+                <a:solidFill>
+                  <a:srgbClr val="14161C"/>
+                </a:solidFill>
+                <a:latin typeface="Be Vietnam Pro" pitchFamily="34" charset="0"/>
+                <a:ea typeface="Be Vietnam Pro" pitchFamily="34" charset="-122"/>
+                <a:cs typeface="Be Vietnam Pro" pitchFamily="34" charset="-120"/>
+              </a:rPr>
+              <a:t> yêu</a:t>
+            </a:r>
+            <a:r>
+              <a:rPr lang="en-US" sz="2550" dirty="0" spc="2" kern="0">
+                <a:solidFill>
+                  <a:srgbClr val="14161C"/>
+                </a:solidFill>
+                <a:latin typeface="Be Vietnam Pro" pitchFamily="34" charset="0"/>
+                <a:ea typeface="Be Vietnam Pro" pitchFamily="34" charset="-122"/>
+                <a:cs typeface="Be Vietnam Pro" pitchFamily="34" charset="-120"/>
+              </a:rPr>
+              <a:t> cầu</a:t>
+            </a:r>
+            <a:r>
               <a:rPr lang="en-US" sz="2550" dirty="0" spc="-3" kern="0">
                 <a:solidFill>
                   <a:srgbClr val="14161C"/>
@@ -8444,10 +8554,10 @@
                 <a:ea typeface="Be Vietnam Pro" pitchFamily="34" charset="-122"/>
                 <a:cs typeface="Be Vietnam Pro" pitchFamily="34" charset="-120"/>
               </a:rPr>
-              <a:t>50</a:t>
-            </a:r>
-            <a:r>
-              <a:rPr lang="en-US" sz="2550" dirty="0" spc="-21" kern="0">
+              <a:t> 100</a:t>
+            </a:r>
+            <a:r>
+              <a:rPr lang="en-US" sz="2550" dirty="0" spc="0" kern="0">
                 <a:solidFill>
                   <a:srgbClr val="14161C"/>
                 </a:solidFill>
@@ -8455,10 +8565,10 @@
                 <a:ea typeface="Be Vietnam Pro" pitchFamily="34" charset="-122"/>
                 <a:cs typeface="Be Vietnam Pro" pitchFamily="34" charset="-120"/>
               </a:rPr>
-              <a:t> yêu</a:t>
-            </a:r>
-            <a:r>
-              <a:rPr lang="en-US" sz="2550" dirty="0" spc="3" kern="0">
+              <a:t> mili</a:t>
+            </a:r>
+            <a:r>
+              <a:rPr lang="en-US" sz="2550" dirty="0" spc="-7" kern="0">
                 <a:solidFill>
                   <a:srgbClr val="14161C"/>
                 </a:solidFill>
@@ -8466,10 +8576,10 @@
                 <a:ea typeface="Be Vietnam Pro" pitchFamily="34" charset="-122"/>
                 <a:cs typeface="Be Vietnam Pro" pitchFamily="34" charset="-120"/>
               </a:rPr>
-              <a:t> cầu</a:t>
-            </a:r>
-            <a:r>
-              <a:rPr lang="en-US" sz="2550" dirty="0" spc="-17" kern="0">
+              <a:t> giây;</a:t>
+            </a:r>
+            <a:r>
+              <a:rPr lang="en-US" sz="2550" dirty="0" spc="-1" kern="0">
                 <a:solidFill>
                   <a:srgbClr val="14161C"/>
                 </a:solidFill>
@@ -8477,10 +8587,10 @@
                 <a:ea typeface="Be Vietnam Pro" pitchFamily="34" charset="-122"/>
                 <a:cs typeface="Be Vietnam Pro" pitchFamily="34" charset="-120"/>
               </a:rPr>
-              <a:t> trong</a:t>
-            </a:r>
-            <a:r>
-              <a:rPr lang="en-US" sz="2550" dirty="0" spc="1" kern="0">
+              <a:t> xử lý</a:t>
+            </a:r>
+            <a:r>
+              <a:rPr lang="en-US" sz="2550" dirty="0" spc="0" kern="0">
                 <a:solidFill>
                   <a:srgbClr val="14161C"/>
                 </a:solidFill>
@@ -8488,10 +8598,10 @@
                 <a:ea typeface="Be Vietnam Pro" pitchFamily="34" charset="-122"/>
                 <a:cs typeface="Be Vietnam Pro" pitchFamily="34" charset="-120"/>
               </a:rPr>
-              <a:t> hàng</a:t>
-            </a:r>
-            <a:r>
-              <a:rPr lang="en-US" sz="2550" dirty="0" spc="9" kern="0">
+              <a:t> lần</a:t>
+            </a:r>
+            <a:r>
+              <a:rPr lang="en-US" sz="2550" dirty="0" spc="7" kern="0">
                 <a:solidFill>
                   <a:srgbClr val="14161C"/>
                 </a:solidFill>
@@ -8499,10 +8609,10 @@
                 <a:ea typeface="Be Vietnam Pro" pitchFamily="34" charset="-122"/>
                 <a:cs typeface="Be Vietnam Pro" pitchFamily="34" charset="-120"/>
               </a:rPr>
-              <a:t> đợi,</a:t>
-            </a:r>
-            <a:r>
-              <a:rPr lang="en-US" sz="2550" dirty="0" spc="-3" kern="0">
+              <a:t> lượt</a:t>
+            </a:r>
+            <a:r>
+              <a:rPr lang="en-US" sz="2550" dirty="0" spc="2" kern="0">
                 <a:solidFill>
                   <a:srgbClr val="14161C"/>
                 </a:solidFill>
@@ -8510,7 +8620,7 @@
                 <a:ea typeface="Be Vietnam Pro" pitchFamily="34" charset="-122"/>
                 <a:cs typeface="Be Vietnam Pro" pitchFamily="34" charset="-120"/>
               </a:rPr>
-              <a:t> 100</a:t>
+              <a:t> thì</a:t>
             </a:r>
             <a:r>
               <a:rPr lang="en-US" sz="2550" dirty="0" spc="0" kern="0">
@@ -8521,10 +8631,10 @@
                 <a:ea typeface="Be Vietnam Pro" pitchFamily="34" charset="-122"/>
                 <a:cs typeface="Be Vietnam Pro" pitchFamily="34" charset="-120"/>
               </a:rPr>
-              <a:t> mili</a:t>
-            </a:r>
-            <a:r>
-              <a:rPr lang="en-US" sz="2550" dirty="0" spc="-7" kern="0">
+              <a:t> chỉ</a:t>
+            </a:r>
+            <a:r>
+              <a:rPr lang="en-US" sz="2550" dirty="0" spc="-1" kern="0">
                 <a:solidFill>
                   <a:srgbClr val="14161C"/>
                 </a:solidFill>
@@ -8532,10 +8642,10 @@
                 <a:ea typeface="Be Vietnam Pro" pitchFamily="34" charset="-122"/>
                 <a:cs typeface="Be Vietnam Pro" pitchFamily="34" charset="-120"/>
               </a:rPr>
-              <a:t> giây</a:t>
-            </a:r>
-            <a:r>
-              <a:rPr lang="en-US" sz="2550" dirty="0" spc="-1" kern="0">
+              <a:t> 10. Shopify còn</a:t>
+            </a:r>
+            <a:r>
+              <a:rPr lang="en-US" sz="2550" dirty="0" spc="0" kern="0">
                 <a:solidFill>
                   <a:srgbClr val="14161C"/>
                 </a:solidFill>
@@ -8543,73 +8653,7 @@
                 <a:ea typeface="Be Vietnam Pro" pitchFamily="34" charset="-122"/>
                 <a:cs typeface="Be Vietnam Pro" pitchFamily="34" charset="-120"/>
               </a:rPr>
-              <a:t> mỗi</a:t>
-            </a:r>
-            <a:r>
-              <a:rPr lang="en-US" sz="2550" dirty="0" spc="-20" kern="0">
-                <a:solidFill>
-                  <a:srgbClr val="14161C"/>
-                </a:solidFill>
-                <a:latin typeface="Be Vietnam Pro" pitchFamily="34" charset="0"/>
-                <a:ea typeface="Be Vietnam Pro" pitchFamily="34" charset="-122"/>
-                <a:cs typeface="Be Vietnam Pro" pitchFamily="34" charset="-120"/>
-              </a:rPr>
-              <a:t> yêu</a:t>
-            </a:r>
-            <a:r>
-              <a:rPr lang="en-US" sz="2550" dirty="0" spc="2" kern="0">
-                <a:solidFill>
-                  <a:srgbClr val="14161C"/>
-                </a:solidFill>
-                <a:latin typeface="Be Vietnam Pro" pitchFamily="34" charset="0"/>
-                <a:ea typeface="Be Vietnam Pro" pitchFamily="34" charset="-122"/>
-                <a:cs typeface="Be Vietnam Pro" pitchFamily="34" charset="-120"/>
-              </a:rPr>
-              <a:t> cầu.</a:t>
-            </a:r>
-            <a:r>
-              <a:rPr lang="en-US" sz="2550" dirty="0" spc="-2" kern="0">
-                <a:solidFill>
-                  <a:srgbClr val="14161C"/>
-                </a:solidFill>
-                <a:latin typeface="Be Vietnam Pro" pitchFamily="34" charset="0"/>
-                <a:ea typeface="Be Vietnam Pro" pitchFamily="34" charset="-122"/>
-                <a:cs typeface="Be Vietnam Pro" pitchFamily="34" charset="-120"/>
-              </a:rPr>
-              <a:t> Shopify</a:t>
-            </a:r>
-            <a:r>
-              <a:rPr lang="en-US" sz="2550" dirty="0" spc="0" kern="0">
-                <a:solidFill>
-                  <a:srgbClr val="14161C"/>
-                </a:solidFill>
-                <a:latin typeface="Be Vietnam Pro" pitchFamily="34" charset="0"/>
-                <a:ea typeface="Be Vietnam Pro" pitchFamily="34" charset="-122"/>
-                <a:cs typeface="Be Vietnam Pro" pitchFamily="34" charset="-120"/>
-              </a:rPr>
-              <a:t> còn</a:t>
-            </a:r>
-            <a:r>
-              <a:rPr lang="en-US" sz="2550" dirty="0" spc="1" kern="0">
-                <a:solidFill>
-                  <a:srgbClr val="14161C"/>
-                </a:solidFill>
-                <a:latin typeface="Be Vietnam Pro" pitchFamily="34" charset="0"/>
-                <a:ea typeface="Be Vietnam Pro" pitchFamily="34" charset="-122"/>
-                <a:cs typeface="Be Vietnam Pro" pitchFamily="34" charset="-120"/>
-              </a:rPr>
-              <a:t> mô</a:t>
-            </a:r>
-            <a:r>
-              <a:rPr lang="en-US" sz="2550" dirty="0" spc="0" kern="0">
-                <a:solidFill>
-                  <a:srgbClr val="14161C"/>
-                </a:solidFill>
-                <a:latin typeface="Be Vietnam Pro" pitchFamily="34" charset="0"/>
-                <a:ea typeface="Be Vietnam Pro" pitchFamily="34" charset="-122"/>
-                <a:cs typeface="Be Vietnam Pro" pitchFamily="34" charset="-120"/>
-              </a:rPr>
-              <a:t> phỏng</a:t>
+              <a:t> mô phỏng</a:t>
             </a:r>
             <a:r>
               <a:rPr lang="en-US" sz="2550" dirty="0" spc="13" kern="0">

--- a/system-design-101/vi/lessons/sd-02-024/slides/sd-02-024.pptx
+++ b/system-design-101/vi/lessons/sd-02-024/slides/sd-02-024.pptx
@@ -3020,11 +3020,10 @@
             <a:tbl>
               <a:tblPr/>
               <a:tblGrid>
-                <a:gridCol w="2304288"/>
-                <a:gridCol w="6254496"/>
-                <a:gridCol w="7900416"/>
+                <a:gridCol w="1905000"/>
+                <a:gridCol w="6096000"/>
               </a:tblGrid>
-              <a:tr h="876300">
+              <a:tr h="742950">
                 <a:tc>
                   <a:txBody>
                     <a:bodyPr/>
@@ -3032,12 +3031,12 @@
                     <a:p>
                       <a:pPr algn="l" indent="0" marL="0">
                         <a:lnSpc>
-                          <a:spcPts val="2700"/>
+                          <a:spcPts val="2520"/>
                         </a:lnSpc>
                         <a:buNone/>
                       </a:pPr>
                       <a:r>
-                        <a:rPr lang="en-US" sz="2250" b="1" dirty="0" spc="-75" kern="0">
+                        <a:rPr lang="en-US" sz="2100" b="1" dirty="0" spc="-72" kern="0">
                           <a:solidFill>
                             <a:srgbClr val="9AA0B5"/>
                           </a:solidFill>
@@ -3081,83 +3080,12 @@
                     <a:p>
                       <a:pPr algn="l" indent="0" marL="0">
                         <a:lnSpc>
-                          <a:spcPts val="2700"/>
+                          <a:spcPts val="2520"/>
                         </a:lnSpc>
                         <a:buNone/>
                       </a:pPr>
                       <a:r>
-                        <a:rPr lang="en-US" sz="2250" b="1" dirty="0" spc="-2" kern="0">
-                          <a:solidFill>
-                            <a:srgbClr val="9AA0B5"/>
-                          </a:solidFill>
-                          <a:latin typeface="Be Vietnam Pro" pitchFamily="34" charset="0"/>
-                          <a:ea typeface="Be Vietnam Pro" pitchFamily="34" charset="-122"/>
-                          <a:cs typeface="Be Vietnam Pro" pitchFamily="34" charset="-120"/>
-                        </a:rPr>
-                        <a:t>Dạng</a:t>
-                      </a:r>
-                      <a:r>
-                        <a:rPr lang="en-US" sz="2250" b="1" dirty="0" spc="1" kern="0">
-                          <a:solidFill>
-                            <a:srgbClr val="9AA0B5"/>
-                          </a:solidFill>
-                          <a:latin typeface="Be Vietnam Pro" pitchFamily="34" charset="0"/>
-                          <a:ea typeface="Be Vietnam Pro" pitchFamily="34" charset="-122"/>
-                          <a:cs typeface="Be Vietnam Pro" pitchFamily="34" charset="-120"/>
-                        </a:rPr>
-                        <a:t> đầy</a:t>
-                      </a:r>
-                      <a:r>
-                        <a:rPr lang="en-US" sz="2250" b="1" dirty="0" spc="4" kern="0">
-                          <a:solidFill>
-                            <a:srgbClr val="9AA0B5"/>
-                          </a:solidFill>
-                          <a:latin typeface="Be Vietnam Pro" pitchFamily="34" charset="0"/>
-                          <a:ea typeface="Be Vietnam Pro" pitchFamily="34" charset="-122"/>
-                          <a:cs typeface="Be Vietnam Pro" pitchFamily="34" charset="-120"/>
-                        </a:rPr>
-                        <a:t> đủ</a:t>
-                      </a:r>
-                      <a:endParaRPr lang="en-US" sz="1200" dirty="0"/>
-                    </a:p>
-                  </a:txBody>
-                  <a:tcPr marL="76200" marR="76200" marT="76200" marB="76200">
-                    <a:lnL w="9525" cap="flat" cmpd="sng" algn="ctr">
-                      <a:solidFill>
-                        <a:srgbClr val="2D3140"/>
-                      </a:solidFill>
-                      <a:prstDash val="solid"/>
-                      <a:round/>
-                      <a:headEnd type="none" w="med" len="med"/>
-                      <a:tailEnd type="none" w="med" len="med"/>
-                    </a:lnL>
-                    <a:lnR w="0" cap="flat" cmpd="sng" algn="ctr">
-                      <a:noFill/>
-                    </a:lnR>
-                    <a:lnT w="0" cap="flat" cmpd="sng" algn="ctr">
-                      <a:noFill/>
-                    </a:lnT>
-                    <a:lnB w="0" cap="flat" cmpd="sng" algn="ctr">
-                      <a:noFill/>
-                    </a:lnB>
-                    <a:solidFill>
-                      <a:srgbClr val="1E212B"/>
-                    </a:solidFill>
-                  </a:tcPr>
-                </a:tc>
-                <a:tc>
-                  <a:txBody>
-                    <a:bodyPr/>
-                    <a:lstStyle/>
-                    <a:p>
-                      <a:pPr algn="l" indent="0" marL="0">
-                        <a:lnSpc>
-                          <a:spcPts val="2700"/>
-                        </a:lnSpc>
-                        <a:buNone/>
-                      </a:pPr>
-                      <a:r>
-                        <a:rPr lang="en-US" sz="2250" b="1" dirty="0" spc="-1" kern="0">
+                        <a:rPr lang="en-US" sz="2100" b="1" dirty="0" spc="-5" kern="0">
                           <a:solidFill>
                             <a:srgbClr val="9AA0B5"/>
                           </a:solidFill>
@@ -3168,7 +3096,7 @@
                         <a:t>Nghĩa</a:t>
                       </a:r>
                       <a:r>
-                        <a:rPr lang="en-US" sz="2250" b="1" dirty="0" spc="-12" kern="0">
+                        <a:rPr lang="en-US" sz="2100" b="1" dirty="0" spc="-14" kern="0">
                           <a:solidFill>
                             <a:srgbClr val="9AA0B5"/>
                           </a:solidFill>
@@ -3179,7 +3107,7 @@
                         <a:t> trong</a:t>
                       </a:r>
                       <a:r>
-                        <a:rPr lang="en-US" sz="2250" b="1" dirty="0" spc="2" kern="0">
+                        <a:rPr lang="en-US" sz="2100" b="1" dirty="0" spc="-1" kern="0">
                           <a:solidFill>
                             <a:srgbClr val="9AA0B5"/>
                           </a:solidFill>
@@ -3223,7 +3151,7 @@
                   </a:tcPr>
                 </a:tc>
               </a:tr>
-              <a:tr h="876300">
+              <a:tr h="742950">
                 <a:tc>
                   <a:txBody>
                     <a:bodyPr/>
@@ -3231,12 +3159,12 @@
                     <a:p>
                       <a:pPr algn="l" indent="0" marL="0">
                         <a:lnSpc>
-                          <a:spcPts val="2700"/>
+                          <a:spcPts val="2520"/>
                         </a:lnSpc>
                         <a:buNone/>
                       </a:pPr>
                       <a:r>
-                        <a:rPr lang="en-US" sz="2250" dirty="0" spc="1" kern="0">
+                        <a:rPr lang="en-US" sz="2100" b="1" dirty="0" spc="-3" kern="0">
                           <a:solidFill>
                             <a:srgbClr val="7C93FF"/>
                           </a:solidFill>
@@ -3286,89 +3214,12 @@
                     <a:p>
                       <a:pPr algn="l" indent="0" marL="0">
                         <a:lnSpc>
-                          <a:spcPts val="2700"/>
+                          <a:spcPts val="2520"/>
                         </a:lnSpc>
                         <a:buNone/>
                       </a:pPr>
                       <a:r>
-                        <a:rPr lang="en-US" sz="2250" dirty="0" spc="-12" kern="0">
-                          <a:solidFill>
-                            <a:srgbClr val="E4E1D8"/>
-                          </a:solidFill>
-                          <a:latin typeface="Be Vietnam Pro" pitchFamily="34" charset="0"/>
-                          <a:ea typeface="Be Vietnam Pro" pitchFamily="34" charset="-122"/>
-                          <a:cs typeface="Be Vietnam Pro" pitchFamily="34" charset="-120"/>
-                        </a:rPr>
-                        <a:t>Site</a:t>
-                      </a:r>
-                      <a:r>
-                        <a:rPr lang="en-US" sz="2250" dirty="0" spc="-13" kern="0">
-                          <a:solidFill>
-                            <a:srgbClr val="E4E1D8"/>
-                          </a:solidFill>
-                          <a:latin typeface="Be Vietnam Pro" pitchFamily="34" charset="0"/>
-                          <a:ea typeface="Be Vietnam Pro" pitchFamily="34" charset="-122"/>
-                          <a:cs typeface="Be Vietnam Pro" pitchFamily="34" charset="-120"/>
-                        </a:rPr>
-                        <a:t> Reliability</a:t>
-                      </a:r>
-                      <a:r>
-                        <a:rPr lang="en-US" sz="2250" dirty="0" spc="1" kern="0">
-                          <a:solidFill>
-                            <a:srgbClr val="E4E1D8"/>
-                          </a:solidFill>
-                          <a:latin typeface="Be Vietnam Pro" pitchFamily="34" charset="0"/>
-                          <a:ea typeface="Be Vietnam Pro" pitchFamily="34" charset="-122"/>
-                          <a:cs typeface="Be Vietnam Pro" pitchFamily="34" charset="-120"/>
-                        </a:rPr>
-                        <a:t> Engineering</a:t>
-                      </a:r>
-                      <a:endParaRPr lang="en-US" sz="1200" dirty="0"/>
-                    </a:p>
-                  </a:txBody>
-                  <a:tcPr marL="76200" marR="76200" marT="76200" marB="76200">
-                    <a:lnL w="9525" cap="flat" cmpd="sng" algn="ctr">
-                      <a:solidFill>
-                        <a:srgbClr val="2D3140"/>
-                      </a:solidFill>
-                      <a:prstDash val="solid"/>
-                      <a:round/>
-                      <a:headEnd type="none" w="med" len="med"/>
-                      <a:tailEnd type="none" w="med" len="med"/>
-                    </a:lnL>
-                    <a:lnR w="0" cap="flat" cmpd="sng" algn="ctr">
-                      <a:noFill/>
-                    </a:lnR>
-                    <a:lnT w="9525" cap="flat" cmpd="sng" algn="ctr">
-                      <a:solidFill>
-                        <a:srgbClr val="2D3140"/>
-                      </a:solidFill>
-                      <a:prstDash val="solid"/>
-                      <a:round/>
-                      <a:headEnd type="none" w="med" len="med"/>
-                      <a:tailEnd type="none" w="med" len="med"/>
-                    </a:lnT>
-                    <a:lnB w="0" cap="flat" cmpd="sng" algn="ctr">
-                      <a:noFill/>
-                    </a:lnB>
-                    <a:solidFill>
-                      <a:srgbClr val="1A1D25"/>
-                    </a:solidFill>
-                  </a:tcPr>
-                </a:tc>
-                <a:tc>
-                  <a:txBody>
-                    <a:bodyPr/>
-                    <a:lstStyle/>
-                    <a:p>
-                      <a:pPr algn="l" indent="0" marL="0">
-                        <a:lnSpc>
-                          <a:spcPts val="2700"/>
-                        </a:lnSpc>
-                        <a:buNone/>
-                      </a:pPr>
-                      <a:r>
-                        <a:rPr lang="en-US" sz="2250" dirty="0" spc="-1" kern="0">
+                        <a:rPr lang="en-US" sz="2100" dirty="0" spc="1" kern="0">
                           <a:solidFill>
                             <a:srgbClr val="E4E1D8"/>
                           </a:solidFill>
@@ -3379,7 +3230,7 @@
                         <a:t>kỹ</a:t>
                       </a:r>
                       <a:r>
-                        <a:rPr lang="en-US" sz="2250" dirty="0" spc="-8" kern="0">
+                        <a:rPr lang="en-US" sz="2100" dirty="0" spc="-9" kern="0">
                           <a:solidFill>
                             <a:srgbClr val="E4E1D8"/>
                           </a:solidFill>
@@ -3390,7 +3241,7 @@
                         <a:t> thuật</a:t>
                       </a:r>
                       <a:r>
-                        <a:rPr lang="en-US" sz="2250" dirty="0" spc="19" kern="0">
+                        <a:rPr lang="en-US" sz="2100" dirty="0" spc="12" kern="0">
                           <a:solidFill>
                             <a:srgbClr val="E4E1D8"/>
                           </a:solidFill>
@@ -3401,7 +3252,7 @@
                         <a:t> độ</a:t>
                       </a:r>
                       <a:r>
-                        <a:rPr lang="en-US" sz="2250" dirty="0" spc="0" kern="0">
+                        <a:rPr lang="en-US" sz="2100" dirty="0" spc="1" kern="0">
                           <a:solidFill>
                             <a:srgbClr val="E4E1D8"/>
                           </a:solidFill>
@@ -3412,7 +3263,7 @@
                         <a:t> tin</a:t>
                       </a:r>
                       <a:r>
-                        <a:rPr lang="en-US" sz="2250" dirty="0" spc="-7" kern="0">
+                        <a:rPr lang="en-US" sz="2100" dirty="0" spc="-9" kern="0">
                           <a:solidFill>
                             <a:srgbClr val="E4E1D8"/>
                           </a:solidFill>
@@ -3423,7 +3274,7 @@
                         <a:t> cậy,</a:t>
                       </a:r>
                       <a:r>
-                        <a:rPr lang="en-US" sz="2250" dirty="0" spc="-3" kern="0">
+                        <a:rPr lang="en-US" sz="2100" dirty="0" spc="-5" kern="0">
                           <a:solidFill>
                             <a:srgbClr val="E4E1D8"/>
                           </a:solidFill>
@@ -3434,7 +3285,7 @@
                         <a:t> sách</a:t>
                       </a:r>
                       <a:r>
-                        <a:rPr lang="en-US" sz="2250" dirty="0" spc="2" kern="0">
+                        <a:rPr lang="en-US" sz="2100" dirty="0" spc="0" kern="0">
                           <a:solidFill>
                             <a:srgbClr val="E4E1D8"/>
                           </a:solidFill>
@@ -3445,7 +3296,7 @@
                         <a:t> của</a:t>
                       </a:r>
                       <a:r>
-                        <a:rPr lang="en-US" sz="2250" dirty="0" spc="-5" kern="0">
+                        <a:rPr lang="en-US" sz="2100" dirty="0" spc="-6" kern="0">
                           <a:solidFill>
                             <a:srgbClr val="E4E1D8"/>
                           </a:solidFill>
@@ -3495,7 +3346,7 @@
                   </a:tcPr>
                 </a:tc>
               </a:tr>
-              <a:tr h="876300">
+              <a:tr h="742950">
                 <a:tc>
                   <a:txBody>
                     <a:bodyPr/>
@@ -3503,12 +3354,12 @@
                     <a:p>
                       <a:pPr algn="l" indent="0" marL="0">
                         <a:lnSpc>
-                          <a:spcPts val="2700"/>
+                          <a:spcPts val="2520"/>
                         </a:lnSpc>
                         <a:buNone/>
                       </a:pPr>
                       <a:r>
-                        <a:rPr lang="en-US" sz="2250" dirty="0" spc="-2" kern="0">
+                        <a:rPr lang="en-US" sz="2100" b="1" dirty="0" kern="0">
                           <a:solidFill>
                             <a:srgbClr val="FFB454"/>
                           </a:solidFill>
@@ -3558,89 +3409,12 @@
                     <a:p>
                       <a:pPr algn="l" indent="0" marL="0">
                         <a:lnSpc>
-                          <a:spcPts val="2700"/>
+                          <a:spcPts val="2520"/>
                         </a:lnSpc>
                         <a:buNone/>
                       </a:pPr>
                       <a:r>
-                        <a:rPr lang="en-US" sz="2250" dirty="0" spc="-8" kern="0">
-                          <a:solidFill>
-                            <a:srgbClr val="E4E1D8"/>
-                          </a:solidFill>
-                          <a:latin typeface="Be Vietnam Pro" pitchFamily="34" charset="0"/>
-                          <a:ea typeface="Be Vietnam Pro" pitchFamily="34" charset="-122"/>
-                          <a:cs typeface="Be Vietnam Pro" pitchFamily="34" charset="-120"/>
-                        </a:rPr>
-                        <a:t>Universally</a:t>
-                      </a:r>
-                      <a:r>
-                        <a:rPr lang="en-US" sz="2250" dirty="0" spc="-1" kern="0">
-                          <a:solidFill>
-                            <a:srgbClr val="E4E1D8"/>
-                          </a:solidFill>
-                          <a:latin typeface="Be Vietnam Pro" pitchFamily="34" charset="0"/>
-                          <a:ea typeface="Be Vietnam Pro" pitchFamily="34" charset="-122"/>
-                          <a:cs typeface="Be Vietnam Pro" pitchFamily="34" charset="-120"/>
-                        </a:rPr>
-                        <a:t> Unique</a:t>
-                      </a:r>
-                      <a:r>
-                        <a:rPr lang="en-US" sz="2250" dirty="0" spc="-3" kern="0">
-                          <a:solidFill>
-                            <a:srgbClr val="E4E1D8"/>
-                          </a:solidFill>
-                          <a:latin typeface="Be Vietnam Pro" pitchFamily="34" charset="0"/>
-                          <a:ea typeface="Be Vietnam Pro" pitchFamily="34" charset="-122"/>
-                          <a:cs typeface="Be Vietnam Pro" pitchFamily="34" charset="-120"/>
-                        </a:rPr>
-                        <a:t> IDentifier</a:t>
-                      </a:r>
-                      <a:endParaRPr lang="en-US" sz="1200" dirty="0"/>
-                    </a:p>
-                  </a:txBody>
-                  <a:tcPr marL="76200" marR="76200" marT="76200" marB="76200">
-                    <a:lnL w="9525" cap="flat" cmpd="sng" algn="ctr">
-                      <a:solidFill>
-                        <a:srgbClr val="2D3140"/>
-                      </a:solidFill>
-                      <a:prstDash val="solid"/>
-                      <a:round/>
-                      <a:headEnd type="none" w="med" len="med"/>
-                      <a:tailEnd type="none" w="med" len="med"/>
-                    </a:lnL>
-                    <a:lnR w="0" cap="flat" cmpd="sng" algn="ctr">
-                      <a:noFill/>
-                    </a:lnR>
-                    <a:lnT w="9525" cap="flat" cmpd="sng" algn="ctr">
-                      <a:solidFill>
-                        <a:srgbClr val="2D3140"/>
-                      </a:solidFill>
-                      <a:prstDash val="solid"/>
-                      <a:round/>
-                      <a:headEnd type="none" w="med" len="med"/>
-                      <a:tailEnd type="none" w="med" len="med"/>
-                    </a:lnT>
-                    <a:lnB w="0" cap="flat" cmpd="sng" algn="ctr">
-                      <a:noFill/>
-                    </a:lnB>
-                    <a:solidFill>
-                      <a:srgbClr val="14161C"/>
-                    </a:solidFill>
-                  </a:tcPr>
-                </a:tc>
-                <a:tc>
-                  <a:txBody>
-                    <a:bodyPr/>
-                    <a:lstStyle/>
-                    <a:p>
-                      <a:pPr algn="l" indent="0" marL="0">
-                        <a:lnSpc>
-                          <a:spcPts val="2700"/>
-                        </a:lnSpc>
-                        <a:buNone/>
-                      </a:pPr>
-                      <a:r>
-                        <a:rPr lang="en-US" sz="2250" dirty="0" spc="-5" kern="0">
+                        <a:rPr lang="en-US" sz="2100" dirty="0" spc="-2" kern="0">
                           <a:solidFill>
                             <a:srgbClr val="E4E1D8"/>
                           </a:solidFill>
@@ -3651,7 +3425,7 @@
                         <a:t>mã</a:t>
                       </a:r>
                       <a:r>
-                        <a:rPr lang="en-US" sz="2250" dirty="0" spc="19" kern="0">
+                        <a:rPr lang="en-US" sz="2100" dirty="0" spc="18" kern="0">
                           <a:solidFill>
                             <a:srgbClr val="E4E1D8"/>
                           </a:solidFill>
@@ -3662,7 +3436,7 @@
                         <a:t> định</a:t>
                       </a:r>
                       <a:r>
-                        <a:rPr lang="en-US" sz="2250" dirty="0" spc="1" kern="0">
+                        <a:rPr lang="en-US" sz="2100" dirty="0" spc="-2" kern="0">
                           <a:solidFill>
                             <a:srgbClr val="E4E1D8"/>
                           </a:solidFill>
@@ -3670,21 +3444,10 @@
                           <a:ea typeface="Be Vietnam Pro" pitchFamily="34" charset="-122"/>
                           <a:cs typeface="Be Vietnam Pro" pitchFamily="34" charset="-120"/>
                         </a:rPr>
-                        <a:t> danh</a:t>
+                        <a:t> danh duy</a:t>
                       </a:r>
                       <a:r>
-                        <a:rPr lang="en-US" sz="2250" dirty="0" spc="2" kern="0">
-                          <a:solidFill>
-                            <a:srgbClr val="E4E1D8"/>
-                          </a:solidFill>
-                          <a:latin typeface="Be Vietnam Pro" pitchFamily="34" charset="0"/>
-                          <a:ea typeface="Be Vietnam Pro" pitchFamily="34" charset="-122"/>
-                          <a:cs typeface="Be Vietnam Pro" pitchFamily="34" charset="-120"/>
-                        </a:rPr>
-                        <a:t> duy</a:t>
-                      </a:r>
-                      <a:r>
-                        <a:rPr lang="en-US" sz="2250" dirty="0" spc="-9" kern="0">
+                        <a:rPr lang="en-US" sz="2100" dirty="0" spc="-10" kern="0">
                           <a:solidFill>
                             <a:srgbClr val="E4E1D8"/>
                           </a:solidFill>
@@ -3734,7 +3497,7 @@
                   </a:tcPr>
                 </a:tc>
               </a:tr>
-              <a:tr h="876300">
+              <a:tr h="742950">
                 <a:tc>
                   <a:txBody>
                     <a:bodyPr/>
@@ -3742,20 +3505,20 @@
                     <a:p>
                       <a:pPr algn="l" indent="0" marL="0">
                         <a:lnSpc>
-                          <a:spcPts val="2700"/>
+                          <a:spcPts val="2520"/>
                         </a:lnSpc>
                         <a:buNone/>
                       </a:pPr>
                       <a:r>
-                        <a:rPr lang="en-US" sz="2250" dirty="0" spc="-3" kern="0">
+                        <a:rPr lang="en-US" sz="2100" b="1" dirty="0" spc="2" kern="0">
                           <a:solidFill>
-                            <a:srgbClr val="3DD6A0"/>
+                            <a:srgbClr val="FFB454"/>
                           </a:solidFill>
                           <a:latin typeface="Be Vietnam Pro" pitchFamily="34" charset="0"/>
                           <a:ea typeface="Be Vietnam Pro" pitchFamily="34" charset="-122"/>
                           <a:cs typeface="Be Vietnam Pro" pitchFamily="34" charset="-120"/>
                         </a:rPr>
-                        <a:t>IMOC</a:t>
+                        <a:t>HTTP</a:t>
                       </a:r>
                       <a:endParaRPr lang="en-US" sz="1200" dirty="0"/>
                     </a:p>
@@ -3797,12 +3560,12 @@
                     <a:p>
                       <a:pPr algn="l" indent="0" marL="0">
                         <a:lnSpc>
-                          <a:spcPts val="2700"/>
+                          <a:spcPts val="2520"/>
                         </a:lnSpc>
                         <a:buNone/>
                       </a:pPr>
                       <a:r>
-                        <a:rPr lang="en-US" sz="2250" dirty="0" spc="-4" kern="0">
+                        <a:rPr lang="en-US" sz="2100" dirty="0" spc="0" kern="0">
                           <a:solidFill>
                             <a:srgbClr val="E4E1D8"/>
                           </a:solidFill>
@@ -3810,10 +3573,10 @@
                           <a:ea typeface="Be Vietnam Pro" pitchFamily="34" charset="-122"/>
                           <a:cs typeface="Be Vietnam Pro" pitchFamily="34" charset="-120"/>
                         </a:rPr>
-                        <a:t>Incident</a:t>
+                        <a:t>giao</a:t>
                       </a:r>
                       <a:r>
-                        <a:rPr lang="en-US" sz="2250" dirty="0" spc="-9" kern="0">
+                        <a:rPr lang="en-US" sz="2100" dirty="0" spc="6" kern="0">
                           <a:solidFill>
                             <a:srgbClr val="E4E1D8"/>
                           </a:solidFill>
@@ -3821,10 +3584,10 @@
                           <a:ea typeface="Be Vietnam Pro" pitchFamily="34" charset="-122"/>
                           <a:cs typeface="Be Vietnam Pro" pitchFamily="34" charset="-120"/>
                         </a:rPr>
-                        <a:t> Manager</a:t>
+                        <a:t> thức</a:t>
                       </a:r>
                       <a:r>
-                        <a:rPr lang="en-US" sz="2250" dirty="0" spc="2" kern="0">
+                        <a:rPr lang="en-US" sz="2100" dirty="0" spc="-11" kern="0">
                           <a:solidFill>
                             <a:srgbClr val="E4E1D8"/>
                           </a:solidFill>
@@ -3832,10 +3595,10 @@
                           <a:ea typeface="Be Vietnam Pro" pitchFamily="34" charset="-122"/>
                           <a:cs typeface="Be Vietnam Pro" pitchFamily="34" charset="-120"/>
                         </a:rPr>
-                        <a:t> On</a:t>
+                        <a:t> truyền</a:t>
                       </a:r>
                       <a:r>
-                        <a:rPr lang="en-US" sz="2250" dirty="0" spc="-2" kern="0">
+                        <a:rPr lang="en-US" sz="2100" dirty="0" spc="2" kern="0">
                           <a:solidFill>
                             <a:srgbClr val="E4E1D8"/>
                           </a:solidFill>
@@ -3843,54 +3606,10 @@
                           <a:ea typeface="Be Vietnam Pro" pitchFamily="34" charset="-122"/>
                           <a:cs typeface="Be Vietnam Pro" pitchFamily="34" charset="-120"/>
                         </a:rPr>
-                        <a:t> Call</a:t>
+                        <a:t> siêu</a:t>
                       </a:r>
-                      <a:endParaRPr lang="en-US" sz="1200" dirty="0"/>
-                    </a:p>
-                  </a:txBody>
-                  <a:tcPr marL="76200" marR="76200" marT="76200" marB="76200">
-                    <a:lnL w="9525" cap="flat" cmpd="sng" algn="ctr">
-                      <a:solidFill>
-                        <a:srgbClr val="2D3140"/>
-                      </a:solidFill>
-                      <a:prstDash val="solid"/>
-                      <a:round/>
-                      <a:headEnd type="none" w="med" len="med"/>
-                      <a:tailEnd type="none" w="med" len="med"/>
-                    </a:lnL>
-                    <a:lnR w="0" cap="flat" cmpd="sng" algn="ctr">
-                      <a:noFill/>
-                    </a:lnR>
-                    <a:lnT w="9525" cap="flat" cmpd="sng" algn="ctr">
-                      <a:solidFill>
-                        <a:srgbClr val="2D3140"/>
-                      </a:solidFill>
-                      <a:prstDash val="solid"/>
-                      <a:round/>
-                      <a:headEnd type="none" w="med" len="med"/>
-                      <a:tailEnd type="none" w="med" len="med"/>
-                    </a:lnT>
-                    <a:lnB w="0" cap="flat" cmpd="sng" algn="ctr">
-                      <a:noFill/>
-                    </a:lnB>
-                    <a:solidFill>
-                      <a:srgbClr val="1A1D25"/>
-                    </a:solidFill>
-                  </a:tcPr>
-                </a:tc>
-                <a:tc>
-                  <a:txBody>
-                    <a:bodyPr/>
-                    <a:lstStyle/>
-                    <a:p>
-                      <a:pPr algn="l" indent="0" marL="0">
-                        <a:lnSpc>
-                          <a:spcPts val="2700"/>
-                        </a:lnSpc>
-                        <a:buNone/>
-                      </a:pPr>
                       <a:r>
-                        <a:rPr lang="en-US" sz="2250" dirty="0" spc="5" kern="0">
+                        <a:rPr lang="en-US" sz="2100" dirty="0" spc="-12" kern="0">
                           <a:solidFill>
                             <a:srgbClr val="E4E1D8"/>
                           </a:solidFill>
@@ -3898,10 +3617,10 @@
                           <a:ea typeface="Be Vietnam Pro" pitchFamily="34" charset="-122"/>
                           <a:cs typeface="Be Vietnam Pro" pitchFamily="34" charset="-120"/>
                         </a:rPr>
-                        <a:t>người</a:t>
+                        <a:t> văn</a:t>
                       </a:r>
                       <a:r>
-                        <a:rPr lang="en-US" sz="2250" dirty="0" spc="1" kern="0">
+                        <a:rPr lang="en-US" sz="2100" dirty="0" spc="-5" kern="0">
                           <a:solidFill>
                             <a:srgbClr val="E4E1D8"/>
                           </a:solidFill>
@@ -3909,40 +3628,7 @@
                           <a:ea typeface="Be Vietnam Pro" pitchFamily="34" charset="-122"/>
                           <a:cs typeface="Be Vietnam Pro" pitchFamily="34" charset="-120"/>
                         </a:rPr>
-                        <a:t> quản lý</a:t>
-                      </a:r>
-                      <a:r>
-                        <a:rPr lang="en-US" sz="2250" dirty="0" spc="5" kern="0">
-                          <a:solidFill>
-                            <a:srgbClr val="E4E1D8"/>
-                          </a:solidFill>
-                          <a:latin typeface="Be Vietnam Pro" pitchFamily="34" charset="0"/>
-                          <a:ea typeface="Be Vietnam Pro" pitchFamily="34" charset="-122"/>
-                          <a:cs typeface="Be Vietnam Pro" pitchFamily="34" charset="-120"/>
-                        </a:rPr>
-                        <a:t> sự cố</a:t>
-                      </a:r>
-                      <a:r>
-                        <a:rPr lang="en-US" sz="2250" dirty="0" spc="9" kern="0">
-                          <a:solidFill>
-                            <a:srgbClr val="E4E1D8"/>
-                          </a:solidFill>
-                          <a:latin typeface="Be Vietnam Pro" pitchFamily="34" charset="0"/>
-                          <a:ea typeface="Be Vietnam Pro" pitchFamily="34" charset="-122"/>
-                          <a:cs typeface="Be Vietnam Pro" pitchFamily="34" charset="-120"/>
-                        </a:rPr>
-                        <a:t> đang</a:t>
-                      </a:r>
-                      <a:r>
-                        <a:rPr lang="en-US" sz="2250" dirty="0" spc="8" kern="0">
-                          <a:solidFill>
-                            <a:srgbClr val="E4E1D8"/>
-                          </a:solidFill>
-                          <a:latin typeface="Be Vietnam Pro" pitchFamily="34" charset="0"/>
-                          <a:ea typeface="Be Vietnam Pro" pitchFamily="34" charset="-122"/>
-                          <a:cs typeface="Be Vietnam Pro" pitchFamily="34" charset="-120"/>
-                        </a:rPr>
-                        <a:t> trực</a:t>
+                        <a:t> bản</a:t>
                       </a:r>
                       <a:endParaRPr lang="en-US" sz="1200" dirty="0"/>
                     </a:p>
@@ -3984,7 +3670,7 @@
                   </a:tcPr>
                 </a:tc>
               </a:tr>
-              <a:tr h="876300">
+              <a:tr h="742950">
                 <a:tc>
                   <a:txBody>
                     <a:bodyPr/>
@@ -3992,20 +3678,20 @@
                     <a:p>
                       <a:pPr algn="l" indent="0" marL="0">
                         <a:lnSpc>
-                          <a:spcPts val="2700"/>
+                          <a:spcPts val="2520"/>
                         </a:lnSpc>
                         <a:buNone/>
                       </a:pPr>
                       <a:r>
-                        <a:rPr lang="en-US" sz="2250" dirty="0" kern="0">
+                        <a:rPr lang="en-US" sz="2100" b="1" dirty="0" spc="7" kern="0">
                           <a:solidFill>
-                            <a:srgbClr val="FF6A4D"/>
+                            <a:srgbClr val="FFB454"/>
                           </a:solidFill>
                           <a:latin typeface="Be Vietnam Pro" pitchFamily="34" charset="0"/>
                           <a:ea typeface="Be Vietnam Pro" pitchFamily="34" charset="-122"/>
                           <a:cs typeface="Be Vietnam Pro" pitchFamily="34" charset="-120"/>
                         </a:rPr>
-                        <a:t>SRM</a:t>
+                        <a:t>SQL</a:t>
                       </a:r>
                       <a:endParaRPr lang="en-US" sz="1200" dirty="0"/>
                     </a:p>
@@ -4047,12 +3733,12 @@
                     <a:p>
                       <a:pPr algn="l" indent="0" marL="0">
                         <a:lnSpc>
-                          <a:spcPts val="2700"/>
+                          <a:spcPts val="2520"/>
                         </a:lnSpc>
                         <a:buNone/>
                       </a:pPr>
                       <a:r>
-                        <a:rPr lang="en-US" sz="2250" dirty="0" spc="-2" kern="0">
+                        <a:rPr lang="en-US" sz="2100" dirty="0" spc="-10" kern="0">
                           <a:solidFill>
                             <a:srgbClr val="E4E1D8"/>
                           </a:solidFill>
@@ -4060,10 +3746,10 @@
                           <a:ea typeface="Be Vietnam Pro" pitchFamily="34" charset="-122"/>
                           <a:cs typeface="Be Vietnam Pro" pitchFamily="34" charset="-120"/>
                         </a:rPr>
-                        <a:t>Support</a:t>
+                        <a:t>ngôn</a:t>
                       </a:r>
                       <a:r>
-                        <a:rPr lang="en-US" sz="2250" dirty="0" spc="-14" kern="0">
+                        <a:rPr lang="en-US" sz="2100" dirty="0" spc="0" kern="0">
                           <a:solidFill>
                             <a:srgbClr val="E4E1D8"/>
                           </a:solidFill>
@@ -4071,10 +3757,10 @@
                           <a:ea typeface="Be Vietnam Pro" pitchFamily="34" charset="-122"/>
                           <a:cs typeface="Be Vietnam Pro" pitchFamily="34" charset="-120"/>
                         </a:rPr>
-                        <a:t> Response</a:t>
+                        <a:t> ngữ</a:t>
                       </a:r>
                       <a:r>
-                        <a:rPr lang="en-US" sz="2250" dirty="0" spc="-8" kern="0">
+                        <a:rPr lang="en-US" sz="2100" dirty="0" spc="-1" kern="0">
                           <a:solidFill>
                             <a:srgbClr val="E4E1D8"/>
                           </a:solidFill>
@@ -4082,54 +3768,10 @@
                           <a:ea typeface="Be Vietnam Pro" pitchFamily="34" charset="-122"/>
                           <a:cs typeface="Be Vietnam Pro" pitchFamily="34" charset="-120"/>
                         </a:rPr>
-                        <a:t> Manager</a:t>
+                        <a:t> truy</a:t>
                       </a:r>
-                      <a:endParaRPr lang="en-US" sz="1200" dirty="0"/>
-                    </a:p>
-                  </a:txBody>
-                  <a:tcPr marL="76200" marR="76200" marT="76200" marB="76200">
-                    <a:lnL w="9525" cap="flat" cmpd="sng" algn="ctr">
-                      <a:solidFill>
-                        <a:srgbClr val="2D3140"/>
-                      </a:solidFill>
-                      <a:prstDash val="solid"/>
-                      <a:round/>
-                      <a:headEnd type="none" w="med" len="med"/>
-                      <a:tailEnd type="none" w="med" len="med"/>
-                    </a:lnL>
-                    <a:lnR w="0" cap="flat" cmpd="sng" algn="ctr">
-                      <a:noFill/>
-                    </a:lnR>
-                    <a:lnT w="9525" cap="flat" cmpd="sng" algn="ctr">
-                      <a:solidFill>
-                        <a:srgbClr val="2D3140"/>
-                      </a:solidFill>
-                      <a:prstDash val="solid"/>
-                      <a:round/>
-                      <a:headEnd type="none" w="med" len="med"/>
-                      <a:tailEnd type="none" w="med" len="med"/>
-                    </a:lnT>
-                    <a:lnB w="0" cap="flat" cmpd="sng" algn="ctr">
-                      <a:noFill/>
-                    </a:lnB>
-                    <a:solidFill>
-                      <a:srgbClr val="14161C"/>
-                    </a:solidFill>
-                  </a:tcPr>
-                </a:tc>
-                <a:tc>
-                  <a:txBody>
-                    <a:bodyPr/>
-                    <a:lstStyle/>
-                    <a:p>
-                      <a:pPr algn="l" indent="0" marL="0">
-                        <a:lnSpc>
-                          <a:spcPts val="2700"/>
-                        </a:lnSpc>
-                        <a:buNone/>
-                      </a:pPr>
                       <a:r>
-                        <a:rPr lang="en-US" sz="2250" dirty="0" spc="5" kern="0">
+                        <a:rPr lang="en-US" sz="2100" dirty="0" spc="-13" kern="0">
                           <a:solidFill>
                             <a:srgbClr val="E4E1D8"/>
                           </a:solidFill>
@@ -4137,10 +3779,10 @@
                           <a:ea typeface="Be Vietnam Pro" pitchFamily="34" charset="-122"/>
                           <a:cs typeface="Be Vietnam Pro" pitchFamily="34" charset="-120"/>
                         </a:rPr>
-                        <a:t>người</a:t>
+                        <a:t> vấn</a:t>
                       </a:r>
                       <a:r>
-                        <a:rPr lang="en-US" sz="2250" dirty="0" spc="0" kern="0">
+                        <a:rPr lang="en-US" sz="2100" dirty="0" spc="-3" kern="0">
                           <a:solidFill>
                             <a:srgbClr val="E4E1D8"/>
                           </a:solidFill>
@@ -4148,10 +3790,10 @@
                           <a:ea typeface="Be Vietnam Pro" pitchFamily="34" charset="-122"/>
                           <a:cs typeface="Be Vietnam Pro" pitchFamily="34" charset="-120"/>
                         </a:rPr>
-                        <a:t> lo</a:t>
+                        <a:t> có</a:t>
                       </a:r>
                       <a:r>
-                        <a:rPr lang="en-US" sz="2250" dirty="0" spc="1" kern="0">
+                        <a:rPr lang="en-US" sz="2100" dirty="0" spc="-2" kern="0">
                           <a:solidFill>
                             <a:srgbClr val="E4E1D8"/>
                           </a:solidFill>
@@ -4159,10 +3801,10 @@
                           <a:ea typeface="Be Vietnam Pro" pitchFamily="34" charset="-122"/>
                           <a:cs typeface="Be Vietnam Pro" pitchFamily="34" charset="-120"/>
                         </a:rPr>
-                        <a:t> phản hồi</a:t>
+                        <a:t> cấu</a:t>
                       </a:r>
                       <a:r>
-                        <a:rPr lang="en-US" sz="2250" dirty="0" spc="2" kern="0">
+                        <a:rPr lang="en-US" sz="2100" dirty="0" spc="-1" kern="0">
                           <a:solidFill>
                             <a:srgbClr val="E4E1D8"/>
                           </a:solidFill>
@@ -4170,18 +3812,7 @@
                           <a:ea typeface="Be Vietnam Pro" pitchFamily="34" charset="-122"/>
                           <a:cs typeface="Be Vietnam Pro" pitchFamily="34" charset="-120"/>
                         </a:rPr>
-                        <a:t> hỗ</a:t>
-                      </a:r>
-                      <a:r>
-                        <a:rPr lang="en-US" sz="2250" dirty="0" spc="-21" kern="0">
-                          <a:solidFill>
-                            <a:srgbClr val="E4E1D8"/>
-                          </a:solidFill>
-                          <a:latin typeface="Be Vietnam Pro" pitchFamily="34" charset="0"/>
-                          <a:ea typeface="Be Vietnam Pro" pitchFamily="34" charset="-122"/>
-                          <a:cs typeface="Be Vietnam Pro" pitchFamily="34" charset="-120"/>
-                        </a:rPr>
-                        <a:t> trợ</a:t>
+                        <a:t> trúc</a:t>
                       </a:r>
                       <a:endParaRPr lang="en-US" sz="1200" dirty="0"/>
                     </a:p>
@@ -4227,15 +3858,681 @@
           </a:graphicData>
         </a:graphic>
       </p:graphicFrame>
-      <p:sp>
-        <p:nvSpPr>
-          <p:cNvPr id="5" name="Text 2"/>
-          <p:cNvSpPr/>
-          <p:nvPr/>
-        </p:nvSpPr>
-        <p:spPr>
-          <a:xfrm>
-            <a:off x="914400" y="7239000"/>
+      <p:graphicFrame>
+        <p:nvGraphicFramePr>
+          <p:cNvPr id="21" name="Table 1"/>
+          <p:cNvGraphicFramePr>
+            <a:graphicFrameLocks noGrp="1"/>
+          </p:cNvGraphicFramePr>
+          <p:nvPr>
+            <p:extLst>
+              <p:ext uri="{D42A27DB-BD31-4B8C-83A1-F6EECF244321}">
+                <p14:modId xmlns:p14="http://schemas.microsoft.com/office/powerpoint/2010/main" val="1579011935"/>
+              </p:ext>
+            </p:extLst>
+          </p:nvPr>
+        </p:nvGraphicFramePr>
+        <p:xfrm>
+          <a:off x="9372600" y="2381250"/>
+          <a:ext cx="13716000" cy="914400"/>
+        </p:xfrm>
+        <a:graphic>
+          <a:graphicData uri="http://schemas.openxmlformats.org/drawingml/2006/table">
+            <a:tbl>
+              <a:tblPr/>
+              <a:tblGrid>
+                <a:gridCol w="1905000"/>
+                <a:gridCol w="6096000"/>
+              </a:tblGrid>
+              <a:tr h="742950">
+                <a:tc>
+                  <a:txBody>
+                    <a:bodyPr/>
+                    <a:lstStyle/>
+                    <a:p>
+                      <a:pPr algn="l" indent="0" marL="0">
+                        <a:lnSpc>
+                          <a:spcPts val="2520"/>
+                        </a:lnSpc>
+                        <a:buNone/>
+                      </a:pPr>
+                      <a:r>
+                        <a:rPr lang="en-US" sz="2100" b="1" dirty="0" spc="-72" kern="0">
+                          <a:solidFill>
+                            <a:srgbClr val="9AA0B5"/>
+                          </a:solidFill>
+                          <a:latin typeface="Be Vietnam Pro" pitchFamily="34" charset="0"/>
+                          <a:ea typeface="Be Vietnam Pro" pitchFamily="34" charset="-122"/>
+                          <a:cs typeface="Be Vietnam Pro" pitchFamily="34" charset="-120"/>
+                        </a:rPr>
+                        <a:t>Từ</a:t>
+                      </a:r>
+                      <a:endParaRPr lang="en-US" sz="1200" dirty="0"/>
+                    </a:p>
+                  </a:txBody>
+                  <a:tcPr marL="76200" marR="76200" marT="76200" marB="76200">
+                    <a:lnL w="9525" cap="flat" cmpd="sng" algn="ctr">
+                      <a:solidFill>
+                        <a:srgbClr val="2D3140"/>
+                      </a:solidFill>
+                      <a:prstDash val="solid"/>
+                      <a:round/>
+                      <a:headEnd type="none" w="med" len="med"/>
+                      <a:tailEnd type="none" w="med" len="med"/>
+                    </a:lnL>
+                    <a:lnR w="0" cap="flat" cmpd="sng" algn="ctr">
+                      <a:noFill/>
+                    </a:lnR>
+                    <a:lnT w="0" cap="flat" cmpd="sng" algn="ctr">
+                      <a:noFill/>
+                    </a:lnT>
+                    <a:lnB w="0" cap="flat" cmpd="sng" algn="ctr">
+                      <a:noFill/>
+                    </a:lnB>
+                    <a:solidFill>
+                      <a:srgbClr val="1E212B"/>
+                    </a:solidFill>
+                  </a:tcPr>
+                </a:tc>
+                <a:tc>
+                  <a:txBody>
+                    <a:bodyPr/>
+                    <a:lstStyle/>
+                    <a:p>
+                      <a:pPr algn="l" indent="0" marL="0">
+                        <a:lnSpc>
+                          <a:spcPts val="2520"/>
+                        </a:lnSpc>
+                        <a:buNone/>
+                      </a:pPr>
+                      <a:r>
+                        <a:rPr lang="en-US" sz="2100" b="1" dirty="0" spc="-5" kern="0">
+                          <a:solidFill>
+                            <a:srgbClr val="9AA0B5"/>
+                          </a:solidFill>
+                          <a:latin typeface="Be Vietnam Pro" pitchFamily="34" charset="0"/>
+                          <a:ea typeface="Be Vietnam Pro" pitchFamily="34" charset="-122"/>
+                          <a:cs typeface="Be Vietnam Pro" pitchFamily="34" charset="-120"/>
+                        </a:rPr>
+                        <a:t>Nghĩa</a:t>
+                      </a:r>
+                      <a:r>
+                        <a:rPr lang="en-US" sz="2100" b="1" dirty="0" spc="-14" kern="0">
+                          <a:solidFill>
+                            <a:srgbClr val="9AA0B5"/>
+                          </a:solidFill>
+                          <a:latin typeface="Be Vietnam Pro" pitchFamily="34" charset="0"/>
+                          <a:ea typeface="Be Vietnam Pro" pitchFamily="34" charset="-122"/>
+                          <a:cs typeface="Be Vietnam Pro" pitchFamily="34" charset="-120"/>
+                        </a:rPr>
+                        <a:t> trong</a:t>
+                      </a:r>
+                      <a:r>
+                        <a:rPr lang="en-US" sz="2100" b="1" dirty="0" spc="-1" kern="0">
+                          <a:solidFill>
+                            <a:srgbClr val="9AA0B5"/>
+                          </a:solidFill>
+                          <a:latin typeface="Be Vietnam Pro" pitchFamily="34" charset="0"/>
+                          <a:ea typeface="Be Vietnam Pro" pitchFamily="34" charset="-122"/>
+                          <a:cs typeface="Be Vietnam Pro" pitchFamily="34" charset="-120"/>
+                        </a:rPr>
+                        <a:t> bài</a:t>
+                      </a:r>
+                      <a:endParaRPr lang="en-US" sz="1200" dirty="0"/>
+                    </a:p>
+                  </a:txBody>
+                  <a:tcPr marL="76200" marR="76200" marT="76200" marB="76200">
+                    <a:lnL w="9525" cap="flat" cmpd="sng" algn="ctr">
+                      <a:solidFill>
+                        <a:srgbClr val="2D3140"/>
+                      </a:solidFill>
+                      <a:prstDash val="solid"/>
+                      <a:round/>
+                      <a:headEnd type="none" w="med" len="med"/>
+                      <a:tailEnd type="none" w="med" len="med"/>
+                    </a:lnL>
+                    <a:lnR w="9525" cap="flat" cmpd="sng" algn="ctr">
+                      <a:solidFill>
+                        <a:srgbClr val="2D3140"/>
+                      </a:solidFill>
+                      <a:prstDash val="solid"/>
+                      <a:round/>
+                      <a:headEnd type="none" w="med" len="med"/>
+                      <a:tailEnd type="none" w="med" len="med"/>
+                    </a:lnR>
+                    <a:lnT w="0" cap="flat" cmpd="sng" algn="ctr">
+                      <a:noFill/>
+                    </a:lnT>
+                    <a:lnB w="0" cap="flat" cmpd="sng" algn="ctr">
+                      <a:noFill/>
+                    </a:lnB>
+                    <a:solidFill>
+                      <a:srgbClr val="1E212B"/>
+                    </a:solidFill>
+                  </a:tcPr>
+                </a:tc>
+              </a:tr>
+              <a:tr h="742950">
+                <a:tc>
+                  <a:txBody>
+                    <a:bodyPr/>
+                    <a:lstStyle/>
+                    <a:p>
+                      <a:pPr algn="l" indent="0" marL="0">
+                        <a:lnSpc>
+                          <a:spcPts val="2520"/>
+                        </a:lnSpc>
+                        <a:buNone/>
+                      </a:pPr>
+                      <a:r>
+                        <a:rPr lang="en-US" sz="2100" b="1" dirty="0" spc="-2" kern="0">
+                          <a:solidFill>
+                            <a:srgbClr val="FFB454"/>
+                          </a:solidFill>
+                          <a:latin typeface="Be Vietnam Pro" pitchFamily="34" charset="0"/>
+                          <a:ea typeface="Be Vietnam Pro" pitchFamily="34" charset="-122"/>
+                          <a:cs typeface="Be Vietnam Pro" pitchFamily="34" charset="-120"/>
+                        </a:rPr>
+                        <a:t>gRPC</a:t>
+                      </a:r>
+                      <a:endParaRPr lang="en-US" sz="1200" dirty="0"/>
+                    </a:p>
+                  </a:txBody>
+                  <a:tcPr marL="76200" marR="76200" marT="76200" marB="76200">
+                    <a:lnL w="9525" cap="flat" cmpd="sng" algn="ctr">
+                      <a:solidFill>
+                        <a:srgbClr val="2D3140"/>
+                      </a:solidFill>
+                      <a:prstDash val="solid"/>
+                      <a:round/>
+                      <a:headEnd type="none" w="med" len="med"/>
+                      <a:tailEnd type="none" w="med" len="med"/>
+                    </a:lnL>
+                    <a:lnR w="0" cap="flat" cmpd="sng" algn="ctr">
+                      <a:noFill/>
+                    </a:lnR>
+                    <a:lnT w="9525" cap="flat" cmpd="sng" algn="ctr">
+                      <a:solidFill>
+                        <a:srgbClr val="2D3140"/>
+                      </a:solidFill>
+                      <a:prstDash val="solid"/>
+                      <a:round/>
+                      <a:headEnd type="none" w="med" len="med"/>
+                      <a:tailEnd type="none" w="med" len="med"/>
+                    </a:lnT>
+                    <a:lnB w="0" cap="flat" cmpd="sng" algn="ctr">
+                      <a:noFill/>
+                    </a:lnB>
+                    <a:solidFill>
+                      <a:srgbClr val="1A1D25"/>
+                    </a:solidFill>
+                  </a:tcPr>
+                </a:tc>
+                <a:tc>
+                  <a:txBody>
+                    <a:bodyPr/>
+                    <a:lstStyle/>
+                    <a:p>
+                      <a:pPr algn="l" indent="0" marL="0">
+                        <a:lnSpc>
+                          <a:spcPts val="2520"/>
+                        </a:lnSpc>
+                        <a:buNone/>
+                      </a:pPr>
+                      <a:r>
+                        <a:rPr lang="en-US" sz="2100" dirty="0" spc="1" kern="0">
+                          <a:solidFill>
+                            <a:srgbClr val="E4E1D8"/>
+                          </a:solidFill>
+                          <a:latin typeface="Be Vietnam Pro" pitchFamily="34" charset="0"/>
+                          <a:ea typeface="Be Vietnam Pro" pitchFamily="34" charset="-122"/>
+                          <a:cs typeface="Be Vietnam Pro" pitchFamily="34" charset="-120"/>
+                        </a:rPr>
+                        <a:t>khung</a:t>
+                      </a:r>
+                      <a:r>
+                        <a:rPr lang="en-US" sz="2100" dirty="0" spc="-11" kern="0">
+                          <a:solidFill>
+                            <a:srgbClr val="E4E1D8"/>
+                          </a:solidFill>
+                          <a:latin typeface="Be Vietnam Pro" pitchFamily="34" charset="0"/>
+                          <a:ea typeface="Be Vietnam Pro" pitchFamily="34" charset="-122"/>
+                          <a:cs typeface="Be Vietnam Pro" pitchFamily="34" charset="-120"/>
+                        </a:rPr>
+                        <a:t> gọi</a:t>
+                      </a:r>
+                      <a:r>
+                        <a:rPr lang="en-US" sz="2100" dirty="0" spc="-3" kern="0">
+                          <a:solidFill>
+                            <a:srgbClr val="E4E1D8"/>
+                          </a:solidFill>
+                          <a:latin typeface="Be Vietnam Pro" pitchFamily="34" charset="0"/>
+                          <a:ea typeface="Be Vietnam Pro" pitchFamily="34" charset="-122"/>
+                          <a:cs typeface="Be Vietnam Pro" pitchFamily="34" charset="-120"/>
+                        </a:rPr>
+                        <a:t> hàm</a:t>
+                      </a:r>
+                      <a:r>
+                        <a:rPr lang="en-US" sz="2100" dirty="0" spc="0" kern="0">
+                          <a:solidFill>
+                            <a:srgbClr val="E4E1D8"/>
+                          </a:solidFill>
+                          <a:latin typeface="Be Vietnam Pro" pitchFamily="34" charset="0"/>
+                          <a:ea typeface="Be Vietnam Pro" pitchFamily="34" charset="-122"/>
+                          <a:cs typeface="Be Vietnam Pro" pitchFamily="34" charset="-120"/>
+                        </a:rPr>
+                        <a:t> từ</a:t>
+                      </a:r>
+                      <a:r>
+                        <a:rPr lang="en-US" sz="2100" dirty="0" spc="-24" kern="0">
+                          <a:solidFill>
+                            <a:srgbClr val="E4E1D8"/>
+                          </a:solidFill>
+                          <a:latin typeface="Be Vietnam Pro" pitchFamily="34" charset="0"/>
+                          <a:ea typeface="Be Vietnam Pro" pitchFamily="34" charset="-122"/>
+                          <a:cs typeface="Be Vietnam Pro" pitchFamily="34" charset="-120"/>
+                        </a:rPr>
+                        <a:t> xa</a:t>
+                      </a:r>
+                      <a:endParaRPr lang="en-US" sz="1200" dirty="0"/>
+                    </a:p>
+                  </a:txBody>
+                  <a:tcPr marL="76200" marR="76200" marT="76200" marB="76200">
+                    <a:lnL w="9525" cap="flat" cmpd="sng" algn="ctr">
+                      <a:solidFill>
+                        <a:srgbClr val="2D3140"/>
+                      </a:solidFill>
+                      <a:prstDash val="solid"/>
+                      <a:round/>
+                      <a:headEnd type="none" w="med" len="med"/>
+                      <a:tailEnd type="none" w="med" len="med"/>
+                    </a:lnL>
+                    <a:lnR w="9525" cap="flat" cmpd="sng" algn="ctr">
+                      <a:solidFill>
+                        <a:srgbClr val="2D3140"/>
+                      </a:solidFill>
+                      <a:prstDash val="solid"/>
+                      <a:round/>
+                      <a:headEnd type="none" w="med" len="med"/>
+                      <a:tailEnd type="none" w="med" len="med"/>
+                    </a:lnR>
+                    <a:lnT w="9525" cap="flat" cmpd="sng" algn="ctr">
+                      <a:solidFill>
+                        <a:srgbClr val="2D3140"/>
+                      </a:solidFill>
+                      <a:prstDash val="solid"/>
+                      <a:round/>
+                      <a:headEnd type="none" w="med" len="med"/>
+                      <a:tailEnd type="none" w="med" len="med"/>
+                    </a:lnT>
+                    <a:lnB w="0" cap="flat" cmpd="sng" algn="ctr">
+                      <a:noFill/>
+                    </a:lnB>
+                    <a:solidFill>
+                      <a:srgbClr val="1A1D25"/>
+                    </a:solidFill>
+                  </a:tcPr>
+                </a:tc>
+              </a:tr>
+              <a:tr h="742950">
+                <a:tc>
+                  <a:txBody>
+                    <a:bodyPr/>
+                    <a:lstStyle/>
+                    <a:p>
+                      <a:pPr algn="l" indent="0" marL="0">
+                        <a:lnSpc>
+                          <a:spcPts val="2520"/>
+                        </a:lnSpc>
+                        <a:buNone/>
+                      </a:pPr>
+                      <a:r>
+                        <a:rPr lang="en-US" sz="2100" b="1" dirty="0" kern="0">
+                          <a:solidFill>
+                            <a:srgbClr val="3DD6A0"/>
+                          </a:solidFill>
+                          <a:latin typeface="Be Vietnam Pro" pitchFamily="34" charset="0"/>
+                          <a:ea typeface="Be Vietnam Pro" pitchFamily="34" charset="-122"/>
+                          <a:cs typeface="Be Vietnam Pro" pitchFamily="34" charset="-120"/>
+                        </a:rPr>
+                        <a:t>IMOC</a:t>
+                      </a:r>
+                      <a:endParaRPr lang="en-US" sz="1200" dirty="0"/>
+                    </a:p>
+                  </a:txBody>
+                  <a:tcPr marL="76200" marR="76200" marT="76200" marB="76200">
+                    <a:lnL w="9525" cap="flat" cmpd="sng" algn="ctr">
+                      <a:solidFill>
+                        <a:srgbClr val="2D3140"/>
+                      </a:solidFill>
+                      <a:prstDash val="solid"/>
+                      <a:round/>
+                      <a:headEnd type="none" w="med" len="med"/>
+                      <a:tailEnd type="none" w="med" len="med"/>
+                    </a:lnL>
+                    <a:lnR w="0" cap="flat" cmpd="sng" algn="ctr">
+                      <a:noFill/>
+                    </a:lnR>
+                    <a:lnT w="9525" cap="flat" cmpd="sng" algn="ctr">
+                      <a:solidFill>
+                        <a:srgbClr val="2D3140"/>
+                      </a:solidFill>
+                      <a:prstDash val="solid"/>
+                      <a:round/>
+                      <a:headEnd type="none" w="med" len="med"/>
+                      <a:tailEnd type="none" w="med" len="med"/>
+                    </a:lnT>
+                    <a:lnB w="0" cap="flat" cmpd="sng" algn="ctr">
+                      <a:noFill/>
+                    </a:lnB>
+                    <a:solidFill>
+                      <a:srgbClr val="14161C"/>
+                    </a:solidFill>
+                  </a:tcPr>
+                </a:tc>
+                <a:tc>
+                  <a:txBody>
+                    <a:bodyPr/>
+                    <a:lstStyle/>
+                    <a:p>
+                      <a:pPr algn="l" indent="0" marL="0">
+                        <a:lnSpc>
+                          <a:spcPts val="2520"/>
+                        </a:lnSpc>
+                        <a:buNone/>
+                      </a:pPr>
+                      <a:r>
+                        <a:rPr lang="en-US" sz="2100" dirty="0" spc="6" kern="0">
+                          <a:solidFill>
+                            <a:srgbClr val="E4E1D8"/>
+                          </a:solidFill>
+                          <a:latin typeface="Be Vietnam Pro" pitchFamily="34" charset="0"/>
+                          <a:ea typeface="Be Vietnam Pro" pitchFamily="34" charset="-122"/>
+                          <a:cs typeface="Be Vietnam Pro" pitchFamily="34" charset="-120"/>
+                        </a:rPr>
+                        <a:t>người</a:t>
+                      </a:r>
+                      <a:r>
+                        <a:rPr lang="en-US" sz="2100" dirty="0" spc="-2" kern="0">
+                          <a:solidFill>
+                            <a:srgbClr val="E4E1D8"/>
+                          </a:solidFill>
+                          <a:latin typeface="Be Vietnam Pro" pitchFamily="34" charset="0"/>
+                          <a:ea typeface="Be Vietnam Pro" pitchFamily="34" charset="-122"/>
+                          <a:cs typeface="Be Vietnam Pro" pitchFamily="34" charset="-120"/>
+                        </a:rPr>
+                        <a:t> quản lý</a:t>
+                      </a:r>
+                      <a:r>
+                        <a:rPr lang="en-US" sz="2100" dirty="0" spc="1" kern="0">
+                          <a:solidFill>
+                            <a:srgbClr val="E4E1D8"/>
+                          </a:solidFill>
+                          <a:latin typeface="Be Vietnam Pro" pitchFamily="34" charset="0"/>
+                          <a:ea typeface="Be Vietnam Pro" pitchFamily="34" charset="-122"/>
+                          <a:cs typeface="Be Vietnam Pro" pitchFamily="34" charset="-120"/>
+                        </a:rPr>
+                        <a:t> sự</a:t>
+                      </a:r>
+                      <a:r>
+                        <a:rPr lang="en-US" sz="2100" dirty="0" spc="-3" kern="0">
+                          <a:solidFill>
+                            <a:srgbClr val="E4E1D8"/>
+                          </a:solidFill>
+                          <a:latin typeface="Be Vietnam Pro" pitchFamily="34" charset="0"/>
+                          <a:ea typeface="Be Vietnam Pro" pitchFamily="34" charset="-122"/>
+                          <a:cs typeface="Be Vietnam Pro" pitchFamily="34" charset="-120"/>
+                        </a:rPr>
+                        <a:t> cố</a:t>
+                      </a:r>
+                      <a:r>
+                        <a:rPr lang="en-US" sz="2100" dirty="0" spc="8" kern="0">
+                          <a:solidFill>
+                            <a:srgbClr val="E4E1D8"/>
+                          </a:solidFill>
+                          <a:latin typeface="Be Vietnam Pro" pitchFamily="34" charset="0"/>
+                          <a:ea typeface="Be Vietnam Pro" pitchFamily="34" charset="-122"/>
+                          <a:cs typeface="Be Vietnam Pro" pitchFamily="34" charset="-120"/>
+                        </a:rPr>
+                        <a:t> đang</a:t>
+                      </a:r>
+                      <a:r>
+                        <a:rPr lang="en-US" sz="2100" dirty="0" spc="6" kern="0">
+                          <a:solidFill>
+                            <a:srgbClr val="E4E1D8"/>
+                          </a:solidFill>
+                          <a:latin typeface="Be Vietnam Pro" pitchFamily="34" charset="0"/>
+                          <a:ea typeface="Be Vietnam Pro" pitchFamily="34" charset="-122"/>
+                          <a:cs typeface="Be Vietnam Pro" pitchFamily="34" charset="-120"/>
+                        </a:rPr>
+                        <a:t> trực</a:t>
+                      </a:r>
+                      <a:endParaRPr lang="en-US" sz="1200" dirty="0"/>
+                    </a:p>
+                  </a:txBody>
+                  <a:tcPr marL="76200" marR="76200" marT="76200" marB="76200">
+                    <a:lnL w="9525" cap="flat" cmpd="sng" algn="ctr">
+                      <a:solidFill>
+                        <a:srgbClr val="2D3140"/>
+                      </a:solidFill>
+                      <a:prstDash val="solid"/>
+                      <a:round/>
+                      <a:headEnd type="none" w="med" len="med"/>
+                      <a:tailEnd type="none" w="med" len="med"/>
+                    </a:lnL>
+                    <a:lnR w="9525" cap="flat" cmpd="sng" algn="ctr">
+                      <a:solidFill>
+                        <a:srgbClr val="2D3140"/>
+                      </a:solidFill>
+                      <a:prstDash val="solid"/>
+                      <a:round/>
+                      <a:headEnd type="none" w="med" len="med"/>
+                      <a:tailEnd type="none" w="med" len="med"/>
+                    </a:lnR>
+                    <a:lnT w="9525" cap="flat" cmpd="sng" algn="ctr">
+                      <a:solidFill>
+                        <a:srgbClr val="2D3140"/>
+                      </a:solidFill>
+                      <a:prstDash val="solid"/>
+                      <a:round/>
+                      <a:headEnd type="none" w="med" len="med"/>
+                      <a:tailEnd type="none" w="med" len="med"/>
+                    </a:lnT>
+                    <a:lnB w="0" cap="flat" cmpd="sng" algn="ctr">
+                      <a:noFill/>
+                    </a:lnB>
+                    <a:solidFill>
+                      <a:srgbClr val="14161C"/>
+                    </a:solidFill>
+                  </a:tcPr>
+                </a:tc>
+              </a:tr>
+              <a:tr h="742950">
+                <a:tc>
+                  <a:txBody>
+                    <a:bodyPr/>
+                    <a:lstStyle/>
+                    <a:p>
+                      <a:pPr algn="l" indent="0" marL="0">
+                        <a:lnSpc>
+                          <a:spcPts val="2520"/>
+                        </a:lnSpc>
+                        <a:buNone/>
+                      </a:pPr>
+                      <a:r>
+                        <a:rPr lang="en-US" sz="2100" b="1" dirty="0" spc="-1" kern="0">
+                          <a:solidFill>
+                            <a:srgbClr val="FF6A4D"/>
+                          </a:solidFill>
+                          <a:latin typeface="Be Vietnam Pro" pitchFamily="34" charset="0"/>
+                          <a:ea typeface="Be Vietnam Pro" pitchFamily="34" charset="-122"/>
+                          <a:cs typeface="Be Vietnam Pro" pitchFamily="34" charset="-120"/>
+                        </a:rPr>
+                        <a:t>SRM</a:t>
+                      </a:r>
+                      <a:endParaRPr lang="en-US" sz="1200" dirty="0"/>
+                    </a:p>
+                  </a:txBody>
+                  <a:tcPr marL="76200" marR="76200" marT="76200" marB="76200">
+                    <a:lnL w="9525" cap="flat" cmpd="sng" algn="ctr">
+                      <a:solidFill>
+                        <a:srgbClr val="2D3140"/>
+                      </a:solidFill>
+                      <a:prstDash val="solid"/>
+                      <a:round/>
+                      <a:headEnd type="none" w="med" len="med"/>
+                      <a:tailEnd type="none" w="med" len="med"/>
+                    </a:lnL>
+                    <a:lnR w="0" cap="flat" cmpd="sng" algn="ctr">
+                      <a:noFill/>
+                    </a:lnR>
+                    <a:lnT w="9525" cap="flat" cmpd="sng" algn="ctr">
+                      <a:solidFill>
+                        <a:srgbClr val="2D3140"/>
+                      </a:solidFill>
+                      <a:prstDash val="solid"/>
+                      <a:round/>
+                      <a:headEnd type="none" w="med" len="med"/>
+                      <a:tailEnd type="none" w="med" len="med"/>
+                    </a:lnT>
+                    <a:lnB w="0" cap="flat" cmpd="sng" algn="ctr">
+                      <a:noFill/>
+                    </a:lnB>
+                    <a:solidFill>
+                      <a:srgbClr val="1A1D25"/>
+                    </a:solidFill>
+                  </a:tcPr>
+                </a:tc>
+                <a:tc>
+                  <a:txBody>
+                    <a:bodyPr/>
+                    <a:lstStyle/>
+                    <a:p>
+                      <a:pPr algn="l" indent="0" marL="0">
+                        <a:lnSpc>
+                          <a:spcPts val="2520"/>
+                        </a:lnSpc>
+                        <a:buNone/>
+                      </a:pPr>
+                      <a:r>
+                        <a:rPr lang="en-US" sz="2100" dirty="0" spc="6" kern="0">
+                          <a:solidFill>
+                            <a:srgbClr val="E4E1D8"/>
+                          </a:solidFill>
+                          <a:latin typeface="Be Vietnam Pro" pitchFamily="34" charset="0"/>
+                          <a:ea typeface="Be Vietnam Pro" pitchFamily="34" charset="-122"/>
+                          <a:cs typeface="Be Vietnam Pro" pitchFamily="34" charset="-120"/>
+                        </a:rPr>
+                        <a:t>người</a:t>
+                      </a:r>
+                      <a:r>
+                        <a:rPr lang="en-US" sz="2100" dirty="0" spc="-2" kern="0">
+                          <a:solidFill>
+                            <a:srgbClr val="E4E1D8"/>
+                          </a:solidFill>
+                          <a:latin typeface="Be Vietnam Pro" pitchFamily="34" charset="0"/>
+                          <a:ea typeface="Be Vietnam Pro" pitchFamily="34" charset="-122"/>
+                          <a:cs typeface="Be Vietnam Pro" pitchFamily="34" charset="-120"/>
+                        </a:rPr>
+                        <a:t> lo</a:t>
+                      </a:r>
+                      <a:r>
+                        <a:rPr lang="en-US" sz="2100" dirty="0" spc="-3" kern="0">
+                          <a:solidFill>
+                            <a:srgbClr val="E4E1D8"/>
+                          </a:solidFill>
+                          <a:latin typeface="Be Vietnam Pro" pitchFamily="34" charset="0"/>
+                          <a:ea typeface="Be Vietnam Pro" pitchFamily="34" charset="-122"/>
+                          <a:cs typeface="Be Vietnam Pro" pitchFamily="34" charset="-120"/>
+                        </a:rPr>
+                        <a:t> phản</a:t>
+                      </a:r>
+                      <a:r>
+                        <a:rPr lang="en-US" sz="2100" dirty="0" spc="-1" kern="0">
+                          <a:solidFill>
+                            <a:srgbClr val="E4E1D8"/>
+                          </a:solidFill>
+                          <a:latin typeface="Be Vietnam Pro" pitchFamily="34" charset="0"/>
+                          <a:ea typeface="Be Vietnam Pro" pitchFamily="34" charset="-122"/>
+                          <a:cs typeface="Be Vietnam Pro" pitchFamily="34" charset="-120"/>
+                        </a:rPr>
+                        <a:t> hồi</a:t>
+                      </a:r>
+                      <a:r>
+                        <a:rPr lang="en-US" sz="2100" dirty="0" spc="-4" kern="0">
+                          <a:solidFill>
+                            <a:srgbClr val="E4E1D8"/>
+                          </a:solidFill>
+                          <a:latin typeface="Be Vietnam Pro" pitchFamily="34" charset="0"/>
+                          <a:ea typeface="Be Vietnam Pro" pitchFamily="34" charset="-122"/>
+                          <a:cs typeface="Be Vietnam Pro" pitchFamily="34" charset="-120"/>
+                        </a:rPr>
+                        <a:t> hỗ</a:t>
+                      </a:r>
+                      <a:r>
+                        <a:rPr lang="en-US" sz="2100" dirty="0" spc="-24" kern="0">
+                          <a:solidFill>
+                            <a:srgbClr val="E4E1D8"/>
+                          </a:solidFill>
+                          <a:latin typeface="Be Vietnam Pro" pitchFamily="34" charset="0"/>
+                          <a:ea typeface="Be Vietnam Pro" pitchFamily="34" charset="-122"/>
+                          <a:cs typeface="Be Vietnam Pro" pitchFamily="34" charset="-120"/>
+                        </a:rPr>
+                        <a:t> trợ</a:t>
+                      </a:r>
+                      <a:endParaRPr lang="en-US" sz="1200" dirty="0"/>
+                    </a:p>
+                  </a:txBody>
+                  <a:tcPr marL="76200" marR="76200" marT="76200" marB="76200">
+                    <a:lnL w="9525" cap="flat" cmpd="sng" algn="ctr">
+                      <a:solidFill>
+                        <a:srgbClr val="2D3140"/>
+                      </a:solidFill>
+                      <a:prstDash val="solid"/>
+                      <a:round/>
+                      <a:headEnd type="none" w="med" len="med"/>
+                      <a:tailEnd type="none" w="med" len="med"/>
+                    </a:lnL>
+                    <a:lnR w="9525" cap="flat" cmpd="sng" algn="ctr">
+                      <a:solidFill>
+                        <a:srgbClr val="2D3140"/>
+                      </a:solidFill>
+                      <a:prstDash val="solid"/>
+                      <a:round/>
+                      <a:headEnd type="none" w="med" len="med"/>
+                      <a:tailEnd type="none" w="med" len="med"/>
+                    </a:lnR>
+                    <a:lnT w="9525" cap="flat" cmpd="sng" algn="ctr">
+                      <a:solidFill>
+                        <a:srgbClr val="2D3140"/>
+                      </a:solidFill>
+                      <a:prstDash val="solid"/>
+                      <a:round/>
+                      <a:headEnd type="none" w="med" len="med"/>
+                      <a:tailEnd type="none" w="med" len="med"/>
+                    </a:lnT>
+                    <a:lnB w="0" cap="flat" cmpd="sng" algn="ctr">
+                      <a:noFill/>
+                    </a:lnB>
+                    <a:solidFill>
+                      <a:srgbClr val="1A1D25"/>
+                    </a:solidFill>
+                  </a:tcPr>
+                </a:tc>
+              </a:tr>
+            </a:tbl>
+          </a:graphicData>
+        </a:graphic>
+      </p:graphicFrame>
+      <p:sp>
+        <p:nvSpPr>
+          <p:cNvPr id="6" name="Text 2"/>
+          <p:cNvSpPr/>
+          <p:nvPr/>
+        </p:nvSpPr>
+        <p:spPr>
+          <a:xfrm>
+            <a:off x="914400" y="6477000"/>
             <a:ext cx="11430000" cy="428625"/>
           </a:xfrm>
           <a:prstGeom prst="rect">
@@ -4279,13 +4576,13 @@
       </p:sp>
       <p:sp>
         <p:nvSpPr>
-          <p:cNvPr id="6" name="Text 3"/>
-          <p:cNvSpPr/>
-          <p:nvPr/>
-        </p:nvSpPr>
-        <p:spPr>
-          <a:xfrm>
-            <a:off x="914400" y="7658100"/>
+          <p:cNvPr id="7" name="Text 3"/>
+          <p:cNvSpPr/>
+          <p:nvPr/>
+        </p:nvSpPr>
+        <p:spPr>
+          <a:xfrm>
+            <a:off x="914400" y="6896100"/>
             <a:ext cx="16459200" cy="552450"/>
           </a:xfrm>
           <a:prstGeom prst="rect">
@@ -4395,13 +4692,13 @@
       </p:sp>
       <p:sp>
         <p:nvSpPr>
-          <p:cNvPr id="7" name="Text 4"/>
-          <p:cNvSpPr/>
-          <p:nvPr/>
-        </p:nvSpPr>
-        <p:spPr>
-          <a:xfrm>
-            <a:off x="914400" y="8191500"/>
+          <p:cNvPr id="8" name="Text 4"/>
+          <p:cNvSpPr/>
+          <p:nvPr/>
+        </p:nvSpPr>
+        <p:spPr>
+          <a:xfrm>
+            <a:off x="914400" y="7429500"/>
             <a:ext cx="16459200" cy="390525"/>
           </a:xfrm>
           <a:prstGeom prst="rect">
@@ -4566,7 +4863,7 @@
       </p:sp>
       <p:sp>
         <p:nvSpPr>
-          <p:cNvPr id="8" name="Shape 5"/>
+          <p:cNvPr id="9" name="Shape 5"/>
           <p:cNvSpPr/>
           <p:nvPr/>
         </p:nvSpPr>
@@ -4591,7 +4888,7 @@
       </p:sp>
       <p:sp>
         <p:nvSpPr>
-          <p:cNvPr id="9" name="Shape 6"/>
+          <p:cNvPr id="10" name="Shape 6"/>
           <p:cNvSpPr/>
           <p:nvPr/>
         </p:nvSpPr>
@@ -4616,7 +4913,7 @@
       </p:sp>
       <p:sp>
         <p:nvSpPr>
-          <p:cNvPr id="10" name="Shape 7"/>
+          <p:cNvPr id="11" name="Shape 7"/>
           <p:cNvSpPr/>
           <p:nvPr/>
         </p:nvSpPr>
@@ -4641,7 +4938,7 @@
       </p:sp>
       <p:sp>
         <p:nvSpPr>
-          <p:cNvPr id="11" name="Shape 8"/>
+          <p:cNvPr id="12" name="Shape 8"/>
           <p:cNvSpPr/>
           <p:nvPr/>
         </p:nvSpPr>
@@ -4666,7 +4963,7 @@
       </p:sp>
       <p:sp>
         <p:nvSpPr>
-          <p:cNvPr id="12" name="Shape 9"/>
+          <p:cNvPr id="13" name="Shape 9"/>
           <p:cNvSpPr/>
           <p:nvPr/>
         </p:nvSpPr>
@@ -4691,7 +4988,7 @@
       </p:sp>
       <p:sp>
         <p:nvSpPr>
-          <p:cNvPr id="13" name="Shape 10"/>
+          <p:cNvPr id="14" name="Shape 10"/>
           <p:cNvSpPr/>
           <p:nvPr/>
         </p:nvSpPr>
@@ -4716,7 +5013,7 @@
       </p:sp>
       <p:sp>
         <p:nvSpPr>
-          <p:cNvPr id="14" name="Shape 11"/>
+          <p:cNvPr id="15" name="Shape 11"/>
           <p:cNvSpPr/>
           <p:nvPr/>
         </p:nvSpPr>
@@ -4741,7 +5038,7 @@
       </p:sp>
       <p:sp>
         <p:nvSpPr>
-          <p:cNvPr id="15" name="Shape 12"/>
+          <p:cNvPr id="16" name="Shape 12"/>
           <p:cNvSpPr/>
           <p:nvPr/>
         </p:nvSpPr>
@@ -4766,7 +5063,7 @@
       </p:sp>
       <p:sp>
         <p:nvSpPr>
-          <p:cNvPr id="16" name="Shape 13"/>
+          <p:cNvPr id="17" name="Shape 13"/>
           <p:cNvSpPr/>
           <p:nvPr/>
         </p:nvSpPr>
@@ -4791,7 +5088,7 @@
       </p:sp>
       <p:sp>
         <p:nvSpPr>
-          <p:cNvPr id="17" name="Shape 14"/>
+          <p:cNvPr id="18" name="Shape 14"/>
           <p:cNvSpPr/>
           <p:nvPr/>
         </p:nvSpPr>
@@ -4816,7 +5113,7 @@
       </p:sp>
       <p:sp>
         <p:nvSpPr>
-          <p:cNvPr id="18" name="Text 15"/>
+          <p:cNvPr id="19" name="Text 15"/>
           <p:cNvSpPr/>
           <p:nvPr/>
         </p:nvSpPr>
@@ -4932,7 +5229,7 @@
       </p:sp>
       <p:sp>
         <p:nvSpPr>
-          <p:cNvPr id="19" name="Shape 16"/>
+          <p:cNvPr id="20" name="Shape 16"/>
           <p:cNvSpPr/>
           <p:nvPr/>
         </p:nvSpPr>
@@ -4956,7 +5253,7 @@
       </p:sp>
       <p:pic>
         <p:nvPicPr>
-          <p:cNvPr id="20" name="Moda image moda-export-watermark-64dfbd9b-4243-4d8e-b88a-8c56640e04c3" descr="">    </p:cNvPr>
+          <p:cNvPr id="21" name="Moda image moda-export-watermark-64dfbd9b-4243-4d8e-b88a-8c56640e04c3" descr="">    </p:cNvPr>
           <p:cNvPicPr>
             <a:picLocks noChangeAspect="1"/>
           </p:cNvPicPr>

--- a/system-design-101/vi/lessons/sd-02-024/slides/sd-02-024.pptx
+++ b/system-design-101/vi/lessons/sd-02-024/slides/sd-02-024.pptx
@@ -6769,7 +6769,84 @@
                 <a:ea typeface="Be Vietnam Pro" pitchFamily="34" charset="-122"/>
                 <a:cs typeface="Be Vietnam Pro" pitchFamily="34" charset="-120"/>
               </a:rPr>
-              <a:t>Quá</a:t>
+              <a:t>Đọc</a:t>
+            </a:r>
+            <a:r>
+              <a:rPr lang="en-US" sz="2250" b="1" dirty="0" spc="3" kern="0">
+                <a:solidFill>
+                  <a:srgbClr val="14161C"/>
+                </a:solidFill>
+                <a:latin typeface="Be Vietnam Pro" pitchFamily="34" charset="0"/>
+                <a:ea typeface="Be Vietnam Pro" pitchFamily="34" charset="-122"/>
+                <a:cs typeface="Be Vietnam Pro" pitchFamily="34" charset="-120"/>
+              </a:rPr>
+              <a:t> quá</a:t>
+            </a:r>
+            <a:r>
+              <a:rPr lang="en-US" sz="2250" b="1" dirty="0" spc="1" kern="0">
+                <a:solidFill>
+                  <a:srgbClr val="14161C"/>
+                </a:solidFill>
+                <a:latin typeface="Be Vietnam Pro" pitchFamily="34" charset="0"/>
+                <a:ea typeface="Be Vietnam Pro" pitchFamily="34" charset="-122"/>
+                <a:cs typeface="Be Vietnam Pro" pitchFamily="34" charset="-120"/>
+              </a:rPr>
+              <a:t> 5</a:t>
+            </a:r>
+            <a:r>
+              <a:rPr lang="en-US" sz="2250" b="1" dirty="0" spc="-2" kern="0">
+                <a:solidFill>
+                  <a:srgbClr val="14161C"/>
+                </a:solidFill>
+                <a:latin typeface="Be Vietnam Pro" pitchFamily="34" charset="0"/>
+                <a:ea typeface="Be Vietnam Pro" pitchFamily="34" charset="-122"/>
+                <a:cs typeface="Be Vietnam Pro" pitchFamily="34" charset="-120"/>
+              </a:rPr>
+              <a:t> giây,</a:t>
+            </a:r>
+            <a:r>
+              <a:rPr lang="en-US" sz="2250" b="1" dirty="0" spc="3" kern="0">
+                <a:solidFill>
+                  <a:srgbClr val="14161C"/>
+                </a:solidFill>
+                <a:latin typeface="Be Vietnam Pro" pitchFamily="34" charset="0"/>
+                <a:ea typeface="Be Vietnam Pro" pitchFamily="34" charset="-122"/>
+                <a:cs typeface="Be Vietnam Pro" pitchFamily="34" charset="-120"/>
+              </a:rPr>
+              <a:t> ghi</a:t>
+            </a:r>
+            <a:r>
+              <a:rPr lang="en-US" sz="2250" b="1" dirty="0" spc="2" kern="0">
+                <a:solidFill>
+                  <a:srgbClr val="14161C"/>
+                </a:solidFill>
+                <a:latin typeface="Be Vietnam Pro" pitchFamily="34" charset="0"/>
+                <a:ea typeface="Be Vietnam Pro" pitchFamily="34" charset="-122"/>
+                <a:cs typeface="Be Vietnam Pro" pitchFamily="34" charset="-120"/>
+              </a:rPr>
+              <a:t> quá</a:t>
+            </a:r>
+            <a:r>
+              <a:rPr lang="en-US" sz="2250" b="1" dirty="0" spc="1" kern="0">
+                <a:solidFill>
+                  <a:srgbClr val="14161C"/>
+                </a:solidFill>
+                <a:latin typeface="Be Vietnam Pro" pitchFamily="34" charset="0"/>
+                <a:ea typeface="Be Vietnam Pro" pitchFamily="34" charset="-122"/>
+                <a:cs typeface="Be Vietnam Pro" pitchFamily="34" charset="-120"/>
+              </a:rPr>
+              <a:t> 1</a:t>
+            </a:r>
+            <a:r>
+              <a:rPr lang="en-US" sz="2250" b="1" dirty="0" spc="-2" kern="0">
+                <a:solidFill>
+                  <a:srgbClr val="14161C"/>
+                </a:solidFill>
+                <a:latin typeface="Be Vietnam Pro" pitchFamily="34" charset="0"/>
+                <a:ea typeface="Be Vietnam Pro" pitchFamily="34" charset="-122"/>
+                <a:cs typeface="Be Vietnam Pro" pitchFamily="34" charset="-120"/>
+              </a:rPr>
+              <a:t> giây:</a:t>
             </a:r>
             <a:r>
               <a:rPr lang="en-US" sz="2250" b="1" dirty="0" spc="0" kern="0">
@@ -6780,29 +6857,7 @@
                 <a:ea typeface="Be Vietnam Pro" pitchFamily="34" charset="-122"/>
                 <a:cs typeface="Be Vietnam Pro" pitchFamily="34" charset="-120"/>
               </a:rPr>
-              <a:t> 1</a:t>
-            </a:r>
-            <a:r>
-              <a:rPr lang="en-US" sz="2250" b="1" dirty="0" spc="-1" kern="0">
-                <a:solidFill>
-                  <a:srgbClr val="14161C"/>
-                </a:solidFill>
-                <a:latin typeface="Be Vietnam Pro" pitchFamily="34" charset="0"/>
-                <a:ea typeface="Be Vietnam Pro" pitchFamily="34" charset="-122"/>
-                <a:cs typeface="Be Vietnam Pro" pitchFamily="34" charset="-120"/>
-              </a:rPr>
-              <a:t> giây:</a:t>
-            </a:r>
-            <a:r>
-              <a:rPr lang="en-US" sz="2250" b="1" dirty="0" spc="0" kern="0">
-                <a:solidFill>
-                  <a:srgbClr val="14161C"/>
-                </a:solidFill>
-                <a:latin typeface="Be Vietnam Pro" pitchFamily="34" charset="0"/>
-                <a:ea typeface="Be Vietnam Pro" pitchFamily="34" charset="-122"/>
-                <a:cs typeface="Be Vietnam Pro" pitchFamily="34" charset="-120"/>
-              </a:rPr>
-              <a:t> coi như lỗi</a:t>
+              <a:t> lỗi</a:t>
             </a:r>
             <a:endParaRPr lang="en-US" sz="2250" dirty="0"/>
           </a:p>

--- a/system-design-101/vi/lessons/sd-02-024/slides/sd-02-024.pptx
+++ b/system-design-101/vi/lessons/sd-02-024/slides/sd-02-024.pptx
@@ -6761,6 +6761,61 @@
               <a:buNone/>
             </a:pPr>
             <a:r>
+              <a:rPr lang="en-US" sz="2250" b="1" dirty="0" spc="2" kern="0">
+                <a:solidFill>
+                  <a:srgbClr val="14161C"/>
+                </a:solidFill>
+                <a:latin typeface="Be Vietnam Pro" pitchFamily="34" charset="0"/>
+                <a:ea typeface="Be Vietnam Pro" pitchFamily="34" charset="-122"/>
+                <a:cs typeface="Be Vietnam Pro" pitchFamily="34" charset="-120"/>
+              </a:rPr>
+              <a:t>Chờ:</a:t>
+            </a:r>
+            <a:r>
+              <a:rPr lang="en-US" sz="2250" b="1" dirty="0" spc="5" kern="0">
+                <a:solidFill>
+                  <a:srgbClr val="14161C"/>
+                </a:solidFill>
+                <a:latin typeface="Be Vietnam Pro" pitchFamily="34" charset="0"/>
+                <a:ea typeface="Be Vietnam Pro" pitchFamily="34" charset="-122"/>
+                <a:cs typeface="Be Vietnam Pro" pitchFamily="34" charset="-120"/>
+              </a:rPr>
+              <a:t> đọc</a:t>
+            </a:r>
+            <a:r>
+              <a:rPr lang="en-US" sz="2250" b="1" dirty="0" spc="1" kern="0">
+                <a:solidFill>
+                  <a:srgbClr val="14161C"/>
+                </a:solidFill>
+                <a:latin typeface="Be Vietnam Pro" pitchFamily="34" charset="0"/>
+                <a:ea typeface="Be Vietnam Pro" pitchFamily="34" charset="-122"/>
+                <a:cs typeface="Be Vietnam Pro" pitchFamily="34" charset="-120"/>
+              </a:rPr>
+              <a:t> 5</a:t>
+            </a:r>
+            <a:r>
+              <a:rPr lang="en-US" sz="2250" b="1" dirty="0" spc="-2" kern="0">
+                <a:solidFill>
+                  <a:srgbClr val="14161C"/>
+                </a:solidFill>
+                <a:latin typeface="Be Vietnam Pro" pitchFamily="34" charset="0"/>
+                <a:ea typeface="Be Vietnam Pro" pitchFamily="34" charset="-122"/>
+                <a:cs typeface="Be Vietnam Pro" pitchFamily="34" charset="-120"/>
+              </a:rPr>
+              <a:t> giây,</a:t>
+            </a:r>
+            <a:r>
+              <a:rPr lang="en-US" sz="2250" b="1" dirty="0" spc="3" kern="0">
+                <a:solidFill>
+                  <a:srgbClr val="14161C"/>
+                </a:solidFill>
+                <a:latin typeface="Be Vietnam Pro" pitchFamily="34" charset="0"/>
+                <a:ea typeface="Be Vietnam Pro" pitchFamily="34" charset="-122"/>
+                <a:cs typeface="Be Vietnam Pro" pitchFamily="34" charset="-120"/>
+              </a:rPr>
+              <a:t> ghi</a:t>
+            </a:r>
+            <a:r>
               <a:rPr lang="en-US" sz="2250" b="1" dirty="0" spc="-1" kern="0">
                 <a:solidFill>
                   <a:srgbClr val="14161C"/>
@@ -6769,10 +6824,10 @@
                 <a:ea typeface="Be Vietnam Pro" pitchFamily="34" charset="-122"/>
                 <a:cs typeface="Be Vietnam Pro" pitchFamily="34" charset="-120"/>
               </a:rPr>
-              <a:t>Đọc</a:t>
-            </a:r>
-            <a:r>
-              <a:rPr lang="en-US" sz="2250" b="1" dirty="0" spc="3" kern="0">
+              <a:t> 1</a:t>
+            </a:r>
+            <a:r>
+              <a:rPr lang="en-US" sz="2250" b="1" dirty="0" spc="-2" kern="0">
                 <a:solidFill>
                   <a:srgbClr val="14161C"/>
                 </a:solidFill>
@@ -6780,84 +6835,7 @@
                 <a:ea typeface="Be Vietnam Pro" pitchFamily="34" charset="-122"/>
                 <a:cs typeface="Be Vietnam Pro" pitchFamily="34" charset="-120"/>
               </a:rPr>
-              <a:t> quá</a:t>
-            </a:r>
-            <a:r>
-              <a:rPr lang="en-US" sz="2250" b="1" dirty="0" spc="1" kern="0">
-                <a:solidFill>
-                  <a:srgbClr val="14161C"/>
-                </a:solidFill>
-                <a:latin typeface="Be Vietnam Pro" pitchFamily="34" charset="0"/>
-                <a:ea typeface="Be Vietnam Pro" pitchFamily="34" charset="-122"/>
-                <a:cs typeface="Be Vietnam Pro" pitchFamily="34" charset="-120"/>
-              </a:rPr>
-              <a:t> 5</a:t>
-            </a:r>
-            <a:r>
-              <a:rPr lang="en-US" sz="2250" b="1" dirty="0" spc="-2" kern="0">
-                <a:solidFill>
-                  <a:srgbClr val="14161C"/>
-                </a:solidFill>
-                <a:latin typeface="Be Vietnam Pro" pitchFamily="34" charset="0"/>
-                <a:ea typeface="Be Vietnam Pro" pitchFamily="34" charset="-122"/>
-                <a:cs typeface="Be Vietnam Pro" pitchFamily="34" charset="-120"/>
-              </a:rPr>
-              <a:t> giây,</a:t>
-            </a:r>
-            <a:r>
-              <a:rPr lang="en-US" sz="2250" b="1" dirty="0" spc="3" kern="0">
-                <a:solidFill>
-                  <a:srgbClr val="14161C"/>
-                </a:solidFill>
-                <a:latin typeface="Be Vietnam Pro" pitchFamily="34" charset="0"/>
-                <a:ea typeface="Be Vietnam Pro" pitchFamily="34" charset="-122"/>
-                <a:cs typeface="Be Vietnam Pro" pitchFamily="34" charset="-120"/>
-              </a:rPr>
-              <a:t> ghi</a:t>
-            </a:r>
-            <a:r>
-              <a:rPr lang="en-US" sz="2250" b="1" dirty="0" spc="2" kern="0">
-                <a:solidFill>
-                  <a:srgbClr val="14161C"/>
-                </a:solidFill>
-                <a:latin typeface="Be Vietnam Pro" pitchFamily="34" charset="0"/>
-                <a:ea typeface="Be Vietnam Pro" pitchFamily="34" charset="-122"/>
-                <a:cs typeface="Be Vietnam Pro" pitchFamily="34" charset="-120"/>
-              </a:rPr>
-              <a:t> quá</a:t>
-            </a:r>
-            <a:r>
-              <a:rPr lang="en-US" sz="2250" b="1" dirty="0" spc="1" kern="0">
-                <a:solidFill>
-                  <a:srgbClr val="14161C"/>
-                </a:solidFill>
-                <a:latin typeface="Be Vietnam Pro" pitchFamily="34" charset="0"/>
-                <a:ea typeface="Be Vietnam Pro" pitchFamily="34" charset="-122"/>
-                <a:cs typeface="Be Vietnam Pro" pitchFamily="34" charset="-120"/>
-              </a:rPr>
-              <a:t> 1</a:t>
-            </a:r>
-            <a:r>
-              <a:rPr lang="en-US" sz="2250" b="1" dirty="0" spc="-2" kern="0">
-                <a:solidFill>
-                  <a:srgbClr val="14161C"/>
-                </a:solidFill>
-                <a:latin typeface="Be Vietnam Pro" pitchFamily="34" charset="0"/>
-                <a:ea typeface="Be Vietnam Pro" pitchFamily="34" charset="-122"/>
-                <a:cs typeface="Be Vietnam Pro" pitchFamily="34" charset="-120"/>
-              </a:rPr>
-              <a:t> giây:</a:t>
-            </a:r>
-            <a:r>
-              <a:rPr lang="en-US" sz="2250" b="1" dirty="0" spc="0" kern="0">
-                <a:solidFill>
-                  <a:srgbClr val="14161C"/>
-                </a:solidFill>
-                <a:latin typeface="Be Vietnam Pro" pitchFamily="34" charset="0"/>
-                <a:ea typeface="Be Vietnam Pro" pitchFamily="34" charset="-122"/>
-                <a:cs typeface="Be Vietnam Pro" pitchFamily="34" charset="-120"/>
-              </a:rPr>
-              <a:t> lỗi</a:t>
+              <a:t> giây</a:t>
             </a:r>
             <a:endParaRPr lang="en-US" sz="2250" dirty="0"/>
           </a:p>
@@ -11163,10 +11141,10 @@
                 <a:ea typeface="Bricolage Grotesque ExtraBold" pitchFamily="34" charset="-122"/>
                 <a:cs typeface="Bricolage Grotesque ExtraBold" pitchFamily="34" charset="-120"/>
               </a:rPr>
-              <a:t> mã</a:t>
-            </a:r>
-            <a:r>
-              <a:rPr lang="en-US" sz="3450" dirty="0" spc="0" kern="0">
+              <a:t> ULID</a:t>
+            </a:r>
+            <a:r>
+              <a:rPr lang="en-US" sz="3450" dirty="0" spc="-20" kern="0">
                 <a:solidFill>
                   <a:srgbClr val="14161C"/>
                 </a:solidFill>
@@ -11174,10 +11152,10 @@
                 <a:ea typeface="Bricolage Grotesque ExtraBold" pitchFamily="34" charset="-122"/>
                 <a:cs typeface="Bricolage Grotesque ExtraBold" pitchFamily="34" charset="-120"/>
               </a:rPr>
-              <a:t> sắp</a:t>
-            </a:r>
-            <a:r>
-              <a:rPr lang="en-US" sz="3450" dirty="0" spc="-38" kern="0">
+              <a:t> tốt</a:t>
+            </a:r>
+            <a:r>
+              <a:rPr lang="en-US" sz="3450" dirty="0" spc="-19" kern="0">
                 <a:solidFill>
                   <a:srgbClr val="14161C"/>
                 </a:solidFill>
@@ -11185,10 +11163,10 @@
                 <a:ea typeface="Bricolage Grotesque ExtraBold" pitchFamily="34" charset="-122"/>
                 <a:cs typeface="Bricolage Grotesque ExtraBold" pitchFamily="34" charset="-120"/>
               </a:rPr>
-              <a:t> xếp</a:t>
-            </a:r>
-            <a:r>
-              <a:rPr lang="en-US" sz="3450" dirty="0" spc="-44" kern="0">
+              <a:t> hơn</a:t>
+            </a:r>
+            <a:r>
+              <a:rPr lang="en-US" sz="3450" dirty="0" spc="3" kern="0">
                 <a:solidFill>
                   <a:srgbClr val="14161C"/>
                 </a:solidFill>
@@ -11196,7 +11174,29 @@
                 <a:ea typeface="Bricolage Grotesque ExtraBold" pitchFamily="34" charset="-122"/>
                 <a:cs typeface="Bricolage Grotesque ExtraBold" pitchFamily="34" charset="-120"/>
               </a:rPr>
-              <a:t> được</a:t>
+              <a:t> UUID</a:t>
+            </a:r>
+            <a:r>
+              <a:rPr lang="en-US" sz="3450" dirty="0" spc="-7" kern="0">
+                <a:solidFill>
+                  <a:srgbClr val="14161C"/>
+                </a:solidFill>
+                <a:latin typeface="Bricolage Grotesque ExtraBold" pitchFamily="34" charset="0"/>
+                <a:ea typeface="Bricolage Grotesque ExtraBold" pitchFamily="34" charset="-122"/>
+                <a:cs typeface="Bricolage Grotesque ExtraBold" pitchFamily="34" charset="-120"/>
+              </a:rPr>
+              <a:t> ngẫu</a:t>
+            </a:r>
+            <a:r>
+              <a:rPr lang="en-US" sz="3450" dirty="0" spc="2" kern="0">
+                <a:solidFill>
+                  <a:srgbClr val="14161C"/>
+                </a:solidFill>
+                <a:latin typeface="Bricolage Grotesque ExtraBold" pitchFamily="34" charset="0"/>
+                <a:ea typeface="Bricolage Grotesque ExtraBold" pitchFamily="34" charset="-122"/>
+                <a:cs typeface="Bricolage Grotesque ExtraBold" pitchFamily="34" charset="-120"/>
+              </a:rPr>
+              <a:t> nhiên</a:t>
             </a:r>
             <a:endParaRPr lang="en-US" sz="3450" dirty="0"/>
           </a:p>
